--- a/week_02/week_02_relational_algebra_sql_review.pptx
+++ b/week_02/week_02_relational_algebra_sql_review.pptx
@@ -4775,338 +4775,338 @@
 </file>
 
 <file path=ppt/slides/slide11.xml><?xml version="1.0" encoding="utf-8"?>
-<p:sld xmlns:p="http://schemas.openxmlformats.org/presentationml/2006/main">
-  <p:cSld>
-    <p:bg>
-      <p:bgPr>
-        <a:solidFill xmlns:a="http://schemas.openxmlformats.org/drawingml/2006/main">
-          <a:srgbClr val="F7F3EA"/>
-        </a:solidFill>
-      </p:bgPr>
-    </p:bg>
-    <p:spTree>
-      <p:nvGrpSpPr>
-        <p:cNvPr id="1" name=""/>
-        <p:cNvGrpSpPr/>
-        <p:nvPr/>
-      </p:nvGrpSpPr>
-      <p:grpSpPr>
-        <a:xfrm xmlns:a="http://schemas.openxmlformats.org/drawingml/2006/main"/>
-      </p:grpSpPr>
-      <p:sp>
-        <p:nvSpPr>
-          <p:cNvPr id="7" name="">
-            <a:extLst xmlns:a="http://schemas.openxmlformats.org/drawingml/2006/main">
-              <a:ext uri="{FF2B5EF4-FFF2-40B4-BE49-F238E27FC236}">
-                <a16:creationId xmlns:a16="http://schemas.microsoft.com/office/drawing/2014/main" id="{5B09DA4E-1507-4FCC-BC51-BAF0499CEF1E}"/>
-              </a:ext>
-            </a:extLst>
-          </p:cNvPr>
-          <p:cNvSpPr>
-            <a:spLocks xmlns:a="http://schemas.openxmlformats.org/drawingml/2006/main" noGrp="1"/>
-          </p:cNvSpPr>
-          <p:nvPr/>
-        </p:nvSpPr>
-        <p:spPr>
-          <a:xfrm xmlns:a="http://schemas.openxmlformats.org/drawingml/2006/main">
-            <a:off x="552450" y="400050"/>
-            <a:ext cx="1314450" cy="323850"/>
-          </a:xfrm>
-          <a:prstGeom xmlns:a="http://schemas.openxmlformats.org/drawingml/2006/main" prst="roundRect">
-            <a:avLst>
-              <a:gd name="adj" fmla="val 50000"/>
-            </a:avLst>
-          </a:prstGeom>
-          <a:solidFill xmlns:a="http://schemas.openxmlformats.org/drawingml/2006/main">
-            <a:srgbClr val="14213D"/>
-          </a:solidFill>
-          <a:ln xmlns:a="http://schemas.openxmlformats.org/drawingml/2006/main" w="9525">
-            <a:solidFill>
-              <a:srgbClr val="14213D"/>
-            </a:solidFill>
-            <a:prstDash val="solid"/>
-          </a:ln>
-        </p:spPr>
-        <p:txBody>
-          <a:bodyPr xmlns:a="http://schemas.openxmlformats.org/drawingml/2006/main" lIns="66675" tIns="0" rIns="66675" bIns="0" anchor="ctr">
-            <a:normAutofit fontScale="96689"/>
-          </a:bodyPr>
-          <a:lstStyle xmlns:a="http://schemas.openxmlformats.org/drawingml/2006/main"/>
-          <a:p xmlns:a="http://schemas.openxmlformats.org/drawingml/2006/main">
-            <a:pPr algn="ctr">
-              <a:buNone/>
-              <a:defRPr sz="1050" b="1">
-                <a:solidFill>
-                  <a:srgbClr val="FFFFFF"/>
-                </a:solidFill>
-                <a:latin typeface="Avenir Next"/>
-                <a:ea typeface="Avenir Next"/>
-                <a:cs typeface="Avenir Next"/>
-              </a:defRPr>
-            </a:pPr>
-            <a:r>
-              <a:rPr sz="1050" b="1">
-                <a:solidFill>
-                  <a:srgbClr val="FFFFFF"/>
-                </a:solidFill>
-                <a:latin typeface="Avenir Next"/>
-                <a:ea typeface="Avenir Next"/>
-                <a:cs typeface="Avenir Next"/>
-              </a:rPr>
-              <a:t>WORKED VISUAL</a:t>
-            </a:r>
-          </a:p>
-        </p:txBody>
-      </p:sp>
-      <p:sp>
-        <p:nvSpPr>
-          <p:cNvPr id="2" name="">
-            <a:extLst xmlns:a="http://schemas.openxmlformats.org/drawingml/2006/main">
-              <a:ext uri="{FF2B5EF4-FFF2-40B4-BE49-F238E27FC236}">
-                <a16:creationId xmlns:a16="http://schemas.microsoft.com/office/drawing/2014/main" id="{550EFE49-8B00-4C1F-8931-0B2CFD2F359C}"/>
-              </a:ext>
-            </a:extLst>
-          </p:cNvPr>
-          <p:cNvSpPr>
-            <a:spLocks xmlns:a="http://schemas.openxmlformats.org/drawingml/2006/main" noGrp="1"/>
-          </p:cNvSpPr>
-          <p:nvPr/>
-        </p:nvSpPr>
-        <p:spPr>
-          <a:xfrm xmlns:a="http://schemas.openxmlformats.org/drawingml/2006/main">
-            <a:off x="552450" y="914400"/>
-            <a:ext cx="11049000" cy="704850"/>
-          </a:xfrm>
-          <a:prstGeom xmlns:a="http://schemas.openxmlformats.org/drawingml/2006/main" prst="rect">
-            <a:avLst/>
-          </a:prstGeom>
-          <a:noFill xmlns:a="http://schemas.openxmlformats.org/drawingml/2006/main"/>
-          <a:ln xmlns:a="http://schemas.openxmlformats.org/drawingml/2006/main" w="0">
-            <a:noFill/>
-            <a:prstDash val="solid"/>
-          </a:ln>
-        </p:spPr>
-        <p:txBody>
-          <a:bodyPr xmlns:a="http://schemas.openxmlformats.org/drawingml/2006/main" wrap="square" lIns="0" tIns="0" rIns="0" bIns="0" anchor="t">
-            <a:noAutofit/>
-          </a:bodyPr>
-          <a:lstStyle xmlns:a="http://schemas.openxmlformats.org/drawingml/2006/main"/>
-          <a:p xmlns:a="http://schemas.openxmlformats.org/drawingml/2006/main">
-            <a:pPr algn="l">
-              <a:lnSpc>
-                <a:spcPct val="95000"/>
-              </a:lnSpc>
-              <a:buNone/>
-              <a:defRPr sz="3075" b="1">
-                <a:solidFill>
-                  <a:srgbClr val="14213D"/>
-                </a:solidFill>
-                <a:latin typeface="Georgia"/>
-                <a:ea typeface="Georgia"/>
-                <a:cs typeface="Georgia"/>
-              </a:defRPr>
-            </a:pPr>
-            <a:r>
-              <a:rPr sz="3075" b="1">
-                <a:solidFill>
-                  <a:srgbClr val="14213D"/>
-                </a:solidFill>
-                <a:latin typeface="Georgia"/>
-                <a:ea typeface="Georgia"/>
-                <a:cs typeface="Georgia"/>
-              </a:rPr>
-              <a:t>An assignee join selects matching pairs</a:t>
-            </a:r>
-          </a:p>
-        </p:txBody>
-      </p:sp>
-      <p:sp>
-        <p:nvSpPr>
-          <p:cNvPr id="3" name="">
-            <a:extLst xmlns:a="http://schemas.openxmlformats.org/drawingml/2006/main">
-              <a:ext uri="{FF2B5EF4-FFF2-40B4-BE49-F238E27FC236}">
-                <a16:creationId xmlns:a16="http://schemas.microsoft.com/office/drawing/2014/main" id="{B57605E0-C7A0-42C3-8CDA-E2A38132DF11}"/>
-              </a:ext>
-            </a:extLst>
-          </p:cNvPr>
-          <p:cNvSpPr>
-            <a:spLocks xmlns:a="http://schemas.openxmlformats.org/drawingml/2006/main" noGrp="1"/>
-          </p:cNvSpPr>
-          <p:nvPr/>
-        </p:nvSpPr>
-        <p:spPr>
-          <a:xfrm xmlns:a="http://schemas.openxmlformats.org/drawingml/2006/main">
-            <a:off x="10477500" y="6334125"/>
-            <a:ext cx="1143000" cy="228600"/>
-          </a:xfrm>
-          <a:prstGeom xmlns:a="http://schemas.openxmlformats.org/drawingml/2006/main" prst="rect">
-            <a:avLst/>
-          </a:prstGeom>
-          <a:noFill xmlns:a="http://schemas.openxmlformats.org/drawingml/2006/main"/>
-          <a:ln xmlns:a="http://schemas.openxmlformats.org/drawingml/2006/main" w="0">
-            <a:noFill/>
-            <a:prstDash val="solid"/>
-          </a:ln>
-        </p:spPr>
-        <p:txBody>
-          <a:bodyPr xmlns:a="http://schemas.openxmlformats.org/drawingml/2006/main" lIns="0" tIns="0" rIns="0" bIns="0" anchor="t">
-            <a:noAutofit/>
-          </a:bodyPr>
-          <a:lstStyle xmlns:a="http://schemas.openxmlformats.org/drawingml/2006/main"/>
-          <a:p xmlns:a="http://schemas.openxmlformats.org/drawingml/2006/main">
-            <a:pPr algn="r">
-              <a:buNone/>
-              <a:defRPr sz="900" b="1">
-                <a:solidFill>
-                  <a:srgbClr val="64748B"/>
-                </a:solidFill>
-                <a:latin typeface="Menlo"/>
-                <a:ea typeface="Menlo"/>
-                <a:cs typeface="Menlo"/>
-              </a:defRPr>
-            </a:pPr>
-            <a:r>
-              <a:rPr sz="900" b="1">
-                <a:solidFill>
-                  <a:srgbClr val="64748B"/>
-                </a:solidFill>
-                <a:latin typeface="Menlo"/>
-                <a:ea typeface="Menlo"/>
-                <a:cs typeface="Menlo"/>
-              </a:rPr>
-              <a:t>11</a:t>
-            </a:r>
-          </a:p>
-        </p:txBody>
-      </p:sp>
-      <p:pic>
-        <p:nvPicPr>
-          <p:cNvPr id="12" name=""/>
-          <p:cNvPicPr>
-            <a:picLocks xmlns:a="http://schemas.openxmlformats.org/drawingml/2006/main" noChangeAspect="1"/>
-          </p:cNvPicPr>
-          <p:nvPr/>
-        </p:nvPicPr>
-        <p:blipFill>
-          <a:blip xmlns:r="http://schemas.openxmlformats.org/officeDocument/2006/relationships" xmlns:a="http://schemas.openxmlformats.org/drawingml/2006/main" r:embed="Rc24729b187c64034"/>
-          <a:stretch xmlns:a="http://schemas.openxmlformats.org/drawingml/2006/main"/>
-        </p:blipFill>
-        <p:spPr>
-          <a:xfrm xmlns:a="http://schemas.openxmlformats.org/drawingml/2006/main">
-            <a:off x="666750" y="2256277"/>
-            <a:ext cx="10858500" cy="2393072"/>
-          </a:xfrm>
-          <a:prstGeom xmlns:a="http://schemas.openxmlformats.org/drawingml/2006/main" prst="rect">
-            <a:avLst/>
-          </a:prstGeom>
-        </p:spPr>
-      </p:pic>
-      <p:sp>
-        <p:nvSpPr>
-          <p:cNvPr id="5" name="">
-            <a:extLst xmlns:a="http://schemas.openxmlformats.org/drawingml/2006/main">
-              <a:ext uri="{FF2B5EF4-FFF2-40B4-BE49-F238E27FC236}">
-                <a16:creationId xmlns:a16="http://schemas.microsoft.com/office/drawing/2014/main" id="{BA48906F-7F73-44E8-9F58-41A87659E37A}"/>
-              </a:ext>
-            </a:extLst>
-          </p:cNvPr>
-          <p:cNvSpPr>
-            <a:spLocks xmlns:a="http://schemas.openxmlformats.org/drawingml/2006/main" noGrp="1"/>
-          </p:cNvSpPr>
-          <p:nvPr/>
-        </p:nvSpPr>
-        <p:spPr>
-          <a:xfrm xmlns:a="http://schemas.openxmlformats.org/drawingml/2006/main">
-            <a:off x="1619250" y="5286375"/>
-            <a:ext cx="8953500" cy="781050"/>
-          </a:xfrm>
-          <a:prstGeom xmlns:a="http://schemas.openxmlformats.org/drawingml/2006/main" prst="roundRect">
-            <a:avLst>
-              <a:gd name="adj" fmla="val 19512"/>
-            </a:avLst>
-          </a:prstGeom>
-          <a:solidFill xmlns:a="http://schemas.openxmlformats.org/drawingml/2006/main">
-            <a:srgbClr val="172033"/>
-          </a:solidFill>
-          <a:ln xmlns:a="http://schemas.openxmlformats.org/drawingml/2006/main" w="0">
-            <a:solidFill>
-              <a:srgbClr val="172033"/>
-            </a:solidFill>
-            <a:prstDash val="solid"/>
-          </a:ln>
-        </p:spPr>
-        <p:txBody>
-          <a:bodyPr xmlns:a="http://schemas.openxmlformats.org/drawingml/2006/main" wrap="square" lIns="190500" tIns="95250" rIns="190500" bIns="95250" anchor="ctr">
-            <a:noAutofit/>
-          </a:bodyPr>
-          <a:lstStyle xmlns:a="http://schemas.openxmlformats.org/drawingml/2006/main"/>
-          <a:p xmlns:a="http://schemas.openxmlformats.org/drawingml/2006/main">
-            <a:pPr algn="ctr">
-              <a:buNone/>
-              <a:defRPr sz="1575" b="1">
-                <a:solidFill>
-                  <a:srgbClr val="FFFFFF"/>
-                </a:solidFill>
-                <a:latin typeface="Menlo"/>
-                <a:ea typeface="Menlo"/>
-                <a:cs typeface="Menlo"/>
-              </a:defRPr>
-            </a:pPr>
-            <a:r>
-              <a:rPr sz="1575" b="1">
-                <a:solidFill>
-                  <a:srgbClr val="FFFFFF"/>
-                </a:solidFill>
-                <a:latin typeface="Menlo"/>
-                <a:ea typeface="Menlo"/>
-                <a:cs typeface="Menlo"/>
-              </a:rPr>
-              <a:t>tickets.assignee_id = users.user_id</a:t>
-            </a:r>
-          </a:p>
-        </p:txBody>
-      </p:sp>
-      <p:sp>
-        <p:nvSpPr>
-          <p:cNvPr id="6" name="">
-            <a:extLst xmlns:a="http://schemas.openxmlformats.org/drawingml/2006/main">
-              <a:ext uri="{FF2B5EF4-FFF2-40B4-BE49-F238E27FC236}">
-                <a16:creationId xmlns:a16="http://schemas.microsoft.com/office/drawing/2014/main" id="{C761406C-18AD-4554-826C-C38283BFDEF9}"/>
-              </a:ext>
-            </a:extLst>
-          </p:cNvPr>
-          <p:cNvSpPr>
-            <a:spLocks xmlns:a="http://schemas.openxmlformats.org/drawingml/2006/main" noGrp="1"/>
-          </p:cNvSpPr>
-          <p:nvPr/>
-        </p:nvSpPr>
-        <p:spPr>
-          <a:xfrm xmlns:a="http://schemas.openxmlformats.org/drawingml/2006/main">
-            <a:off x="1619250" y="5286375"/>
-            <a:ext cx="76200" cy="781050"/>
-          </a:xfrm>
-          <a:prstGeom xmlns:a="http://schemas.openxmlformats.org/drawingml/2006/main" prst="rect">
-            <a:avLst/>
-          </a:prstGeom>
-          <a:solidFill xmlns:a="http://schemas.openxmlformats.org/drawingml/2006/main">
-            <a:srgbClr val="F4A261"/>
-          </a:solidFill>
-          <a:ln xmlns:a="http://schemas.openxmlformats.org/drawingml/2006/main" w="0">
-            <a:solidFill>
-              <a:srgbClr val="F4A261"/>
-            </a:solidFill>
-            <a:prstDash val="solid"/>
-          </a:ln>
-        </p:spPr>
-      </p:sp>
-    </p:spTree>
-    <p:extLst>
-      <p:ext uri="{BB962C8B-B14F-4D97-AF65-F5344CB8AC3E}">
-        <p14:creationId xmlns:p14="http://schemas.microsoft.com/office/powerpoint/2010/main" val="297771293"/>
-      </p:ext>
-    </p:extLst>
-  </p:cSld>
-</p:sld>
+<ns0:sld xmlns:ns0="http://schemas.openxmlformats.org/presentationml/2006/main" xmlns:ns1="http://schemas.openxmlformats.org/drawingml/2006/main" xmlns:ns2="http://schemas.microsoft.com/office/drawing/2014/main" xmlns:ns3="http://schemas.openxmlformats.org/officeDocument/2006/relationships" xmlns:ns4="http://schemas.microsoft.com/office/powerpoint/2010/main">
+  <ns0:cSld>
+    <ns0:bg>
+      <ns0:bgPr>
+        <ns1:solidFill>
+          <ns1:srgbClr val="F7F3EA"/>
+        </ns1:solidFill>
+      </ns0:bgPr>
+    </ns0:bg>
+    <ns0:spTree>
+      <ns0:nvGrpSpPr>
+        <ns0:cNvPr id="1" name=""/>
+        <ns0:cNvGrpSpPr/>
+        <ns0:nvPr/>
+      </ns0:nvGrpSpPr>
+      <ns0:grpSpPr>
+        <ns1:xfrm/>
+      </ns0:grpSpPr>
+      <ns0:sp>
+        <ns0:nvSpPr>
+          <ns0:cNvPr id="7" name="">
+            <ns1:extLst>
+              <ns1:ext uri="{FF2B5EF4-FFF2-40B4-BE49-F238E27FC236}">
+                <ns2:creationId id="{5B09DA4E-1507-4FCC-BC51-BAF0499CEF1E}"/>
+              </ns1:ext>
+            </ns1:extLst>
+          </ns0:cNvPr>
+          <ns0:cNvSpPr>
+            <ns1:spLocks noGrp="1"/>
+          </ns0:cNvSpPr>
+          <ns0:nvPr/>
+        </ns0:nvSpPr>
+        <ns0:spPr>
+          <ns1:xfrm>
+            <ns1:off x="552450" y="400050"/>
+            <ns1:ext cx="1314450" cy="323850"/>
+          </ns1:xfrm>
+          <ns1:prstGeom prst="roundRect">
+            <ns1:avLst>
+              <ns1:gd name="adj" fmla="val 50000"/>
+            </ns1:avLst>
+          </ns1:prstGeom>
+          <ns1:solidFill>
+            <ns1:srgbClr val="14213D"/>
+          </ns1:solidFill>
+          <ns1:ln w="9525">
+            <ns1:solidFill>
+              <ns1:srgbClr val="14213D"/>
+            </ns1:solidFill>
+            <ns1:prstDash val="solid"/>
+          </ns1:ln>
+        </ns0:spPr>
+        <ns0:txBody>
+          <ns1:bodyPr lIns="66675" tIns="0" rIns="66675" bIns="0" anchor="ctr">
+            <ns1:normAutofit fontScale="96689"/>
+          </ns1:bodyPr>
+          <ns1:lstStyle/>
+          <ns1:p>
+            <ns1:pPr algn="ctr">
+              <ns1:buNone/>
+              <ns1:defRPr sz="1050" b="1">
+                <ns1:solidFill>
+                  <ns1:srgbClr val="FFFFFF"/>
+                </ns1:solidFill>
+                <ns1:latin typeface="Avenir Next"/>
+                <ns1:ea typeface="Avenir Next"/>
+                <ns1:cs typeface="Avenir Next"/>
+              </ns1:defRPr>
+            </ns1:pPr>
+            <ns1:r>
+              <ns1:rPr sz="1050" b="1">
+                <ns1:solidFill>
+                  <ns1:srgbClr val="FFFFFF"/>
+                </ns1:solidFill>
+                <ns1:latin typeface="Avenir Next"/>
+                <ns1:ea typeface="Avenir Next"/>
+                <ns1:cs typeface="Avenir Next"/>
+              </ns1:rPr>
+              <ns1:t>WORKED VISUAL</ns1:t>
+            </ns1:r>
+          </ns1:p>
+        </ns0:txBody>
+      </ns0:sp>
+      <ns0:sp>
+        <ns0:nvSpPr>
+          <ns0:cNvPr id="2" name="">
+            <ns1:extLst>
+              <ns1:ext uri="{FF2B5EF4-FFF2-40B4-BE49-F238E27FC236}">
+                <ns2:creationId id="{550EFE49-8B00-4C1F-8931-0B2CFD2F359C}"/>
+              </ns1:ext>
+            </ns1:extLst>
+          </ns0:cNvPr>
+          <ns0:cNvSpPr>
+            <ns1:spLocks noGrp="1"/>
+          </ns0:cNvSpPr>
+          <ns0:nvPr/>
+        </ns0:nvSpPr>
+        <ns0:spPr>
+          <ns1:xfrm>
+            <ns1:off x="552450" y="914400"/>
+            <ns1:ext cx="11049000" cy="704850"/>
+          </ns1:xfrm>
+          <ns1:prstGeom prst="rect">
+            <ns1:avLst/>
+          </ns1:prstGeom>
+          <ns1:noFill/>
+          <ns1:ln w="0">
+            <ns1:noFill/>
+            <ns1:prstDash val="solid"/>
+          </ns1:ln>
+        </ns0:spPr>
+        <ns0:txBody>
+          <ns1:bodyPr wrap="square" lIns="0" tIns="0" rIns="0" bIns="0" anchor="t">
+            <ns1:noAutofit/>
+          </ns1:bodyPr>
+          <ns1:lstStyle/>
+          <ns1:p>
+            <ns1:pPr algn="l">
+              <ns1:lnSpc>
+                <ns1:spcPct val="95000"/>
+              </ns1:lnSpc>
+              <ns1:buNone/>
+              <ns1:defRPr sz="3075" b="1">
+                <ns1:solidFill>
+                  <ns1:srgbClr val="14213D"/>
+                </ns1:solidFill>
+                <ns1:latin typeface="Georgia"/>
+                <ns1:ea typeface="Georgia"/>
+                <ns1:cs typeface="Georgia"/>
+              </ns1:defRPr>
+            </ns1:pPr>
+            <ns1:r>
+              <ns1:rPr sz="3075" b="1">
+                <ns1:solidFill>
+                  <ns1:srgbClr val="14213D"/>
+                </ns1:solidFill>
+                <ns1:latin typeface="Georgia"/>
+                <ns1:ea typeface="Georgia"/>
+                <ns1:cs typeface="Georgia"/>
+              </ns1:rPr>
+              <ns1:t>An assignee join selects matching pairs</ns1:t>
+            </ns1:r>
+          </ns1:p>
+        </ns0:txBody>
+      </ns0:sp>
+      <ns0:sp>
+        <ns0:nvSpPr>
+          <ns0:cNvPr id="3" name="">
+            <ns1:extLst>
+              <ns1:ext uri="{FF2B5EF4-FFF2-40B4-BE49-F238E27FC236}">
+                <ns2:creationId id="{B57605E0-C7A0-42C3-8CDA-E2A38132DF11}"/>
+              </ns1:ext>
+            </ns1:extLst>
+          </ns0:cNvPr>
+          <ns0:cNvSpPr>
+            <ns1:spLocks noGrp="1"/>
+          </ns0:cNvSpPr>
+          <ns0:nvPr/>
+        </ns0:nvSpPr>
+        <ns0:spPr>
+          <ns1:xfrm>
+            <ns1:off x="10477500" y="6334125"/>
+            <ns1:ext cx="1143000" cy="228600"/>
+          </ns1:xfrm>
+          <ns1:prstGeom prst="rect">
+            <ns1:avLst/>
+          </ns1:prstGeom>
+          <ns1:noFill/>
+          <ns1:ln w="0">
+            <ns1:noFill/>
+            <ns1:prstDash val="solid"/>
+          </ns1:ln>
+        </ns0:spPr>
+        <ns0:txBody>
+          <ns1:bodyPr lIns="0" tIns="0" rIns="0" bIns="0" anchor="t">
+            <ns1:noAutofit/>
+          </ns1:bodyPr>
+          <ns1:lstStyle/>
+          <ns1:p>
+            <ns1:pPr algn="r">
+              <ns1:buNone/>
+              <ns1:defRPr sz="900" b="1">
+                <ns1:solidFill>
+                  <ns1:srgbClr val="64748B"/>
+                </ns1:solidFill>
+                <ns1:latin typeface="Menlo"/>
+                <ns1:ea typeface="Menlo"/>
+                <ns1:cs typeface="Menlo"/>
+              </ns1:defRPr>
+            </ns1:pPr>
+            <ns1:r>
+              <ns1:rPr sz="900" b="1">
+                <ns1:solidFill>
+                  <ns1:srgbClr val="64748B"/>
+                </ns1:solidFill>
+                <ns1:latin typeface="Menlo"/>
+                <ns1:ea typeface="Menlo"/>
+                <ns1:cs typeface="Menlo"/>
+              </ns1:rPr>
+              <ns1:t>11</ns1:t>
+            </ns1:r>
+          </ns1:p>
+        </ns0:txBody>
+      </ns0:sp>
+      <ns0:pic>
+        <ns0:nvPicPr>
+          <ns0:cNvPr id="12" name="" descr="Relational-algebra diagram: 12 ticket tuples and 8 user tuples form 96 candidate pairs in the Cartesian product. Filtering with T.assignee_id = U.user_id keeps only matching pairs, the theta-join result. This is a conceptual derivation, not a requirement that the database physically materialize all 96 pairs."/>
+          <ns0:cNvPicPr>
+            <ns1:picLocks noChangeAspect="1"/>
+          </ns0:cNvPicPr>
+          <ns0:nvPr/>
+        </ns0:nvPicPr>
+        <ns0:blipFill>
+          <ns1:blip ns3:embed="Rc24729b187c64034"/>
+          <ns1:stretch/>
+        </ns0:blipFill>
+        <ns0:spPr>
+          <ns1:xfrm>
+            <ns1:off x="666750" y="2256277"/>
+            <ns1:ext cx="10858500" cy="2393072"/>
+          </ns1:xfrm>
+          <ns1:prstGeom prst="rect">
+            <ns1:avLst/>
+          </ns1:prstGeom>
+        </ns0:spPr>
+      </ns0:pic>
+      <ns0:sp>
+        <ns0:nvSpPr>
+          <ns0:cNvPr id="5" name="">
+            <ns1:extLst>
+              <ns1:ext uri="{FF2B5EF4-FFF2-40B4-BE49-F238E27FC236}">
+                <ns2:creationId id="{BA48906F-7F73-44E8-9F58-41A87659E37A}"/>
+              </ns1:ext>
+            </ns1:extLst>
+          </ns0:cNvPr>
+          <ns0:cNvSpPr>
+            <ns1:spLocks noGrp="1"/>
+          </ns0:cNvSpPr>
+          <ns0:nvPr/>
+        </ns0:nvSpPr>
+        <ns0:spPr>
+          <ns1:xfrm>
+            <ns1:off x="1619250" y="5286375"/>
+            <ns1:ext cx="8953500" cy="781050"/>
+          </ns1:xfrm>
+          <ns1:prstGeom prst="roundRect">
+            <ns1:avLst>
+              <ns1:gd name="adj" fmla="val 19512"/>
+            </ns1:avLst>
+          </ns1:prstGeom>
+          <ns1:solidFill>
+            <ns1:srgbClr val="172033"/>
+          </ns1:solidFill>
+          <ns1:ln w="0">
+            <ns1:solidFill>
+              <ns1:srgbClr val="172033"/>
+            </ns1:solidFill>
+            <ns1:prstDash val="solid"/>
+          </ns1:ln>
+        </ns0:spPr>
+        <ns0:txBody>
+          <ns1:bodyPr wrap="square" lIns="190500" tIns="95250" rIns="190500" bIns="95250" anchor="ctr">
+            <ns1:noAutofit/>
+          </ns1:bodyPr>
+          <ns1:lstStyle/>
+          <ns1:p>
+            <ns1:pPr algn="ctr">
+              <ns1:buNone/>
+              <ns1:defRPr sz="1575" b="1">
+                <ns1:solidFill>
+                  <ns1:srgbClr val="FFFFFF"/>
+                </ns1:solidFill>
+                <ns1:latin typeface="Menlo"/>
+                <ns1:ea typeface="Menlo"/>
+                <ns1:cs typeface="Menlo"/>
+              </ns1:defRPr>
+            </ns1:pPr>
+            <ns1:r>
+              <ns1:rPr sz="1575" b="1">
+                <ns1:solidFill>
+                  <ns1:srgbClr val="FFFFFF"/>
+                </ns1:solidFill>
+                <ns1:latin typeface="Menlo"/>
+                <ns1:ea typeface="Menlo"/>
+                <ns1:cs typeface="Menlo"/>
+              </ns1:rPr>
+              <ns1:t>tickets.assignee_id = users.user_id</ns1:t>
+            </ns1:r>
+          </ns1:p>
+        </ns0:txBody>
+      </ns0:sp>
+      <ns0:sp>
+        <ns0:nvSpPr>
+          <ns0:cNvPr id="6" name="">
+            <ns1:extLst>
+              <ns1:ext uri="{FF2B5EF4-FFF2-40B4-BE49-F238E27FC236}">
+                <ns2:creationId id="{C761406C-18AD-4554-826C-C38283BFDEF9}"/>
+              </ns1:ext>
+            </ns1:extLst>
+          </ns0:cNvPr>
+          <ns0:cNvSpPr>
+            <ns1:spLocks noGrp="1"/>
+          </ns0:cNvSpPr>
+          <ns0:nvPr/>
+        </ns0:nvSpPr>
+        <ns0:spPr>
+          <ns1:xfrm>
+            <ns1:off x="1619250" y="5286375"/>
+            <ns1:ext cx="76200" cy="781050"/>
+          </ns1:xfrm>
+          <ns1:prstGeom prst="rect">
+            <ns1:avLst/>
+          </ns1:prstGeom>
+          <ns1:solidFill>
+            <ns1:srgbClr val="F4A261"/>
+          </ns1:solidFill>
+          <ns1:ln w="0">
+            <ns1:solidFill>
+              <ns1:srgbClr val="F4A261"/>
+            </ns1:solidFill>
+            <ns1:prstDash val="solid"/>
+          </ns1:ln>
+        </ns0:spPr>
+      </ns0:sp>
+    </ns0:spTree>
+    <ns0:extLst>
+      <ns0:ext uri="{BB962C8B-B14F-4D97-AF65-F5344CB8AC3E}">
+        <ns4:creationId val="297771293"/>
+      </ns0:ext>
+    </ns0:extLst>
+  </ns0:cSld>
+</ns0:sld>
 </file>
 
 <file path=ppt/slides/slide12.xml><?xml version="1.0" encoding="utf-8"?>

--- a/week_02/week_02_relational_algebra_sql_review.pptx
+++ b/week_02/week_02_relational_algebra_sql_review.pptx
@@ -29,6 +29,7 @@
     <p:sldId xmlns:r="http://schemas.openxmlformats.org/officeDocument/2006/relationships" id="274" r:id="R5b08d6e0c9a54513"/>
     <p:sldId xmlns:r="http://schemas.openxmlformats.org/officeDocument/2006/relationships" id="275" r:id="R17b747b8bf734b5b"/>
     <p:sldId xmlns:r="http://schemas.openxmlformats.org/officeDocument/2006/relationships" id="276" r:id="R801ba88687e446cc"/>
+    <p:sldId xmlns:ns0="http://schemas.openxmlformats.org/officeDocument/2006/relationships" id="277" ns0:id="rId27"/>
   </p:sldIdLst>
   <p:sldSz cx="12192000" cy="6858000"/>
   <p:notesSz cx="6858000" cy="9144000"/>
@@ -2228,6 +2229,76 @@
   </p:cSld>
   <p:clrMapOvr>
     <a:masterClrMapping xmlns:a="http://schemas.openxmlformats.org/drawingml/2006/main"/>
+  </p:clrMapOvr>
+</p:notes>
+</file>
+
+<file path=ppt/notesSlides/notesSlide22.xml><?xml version="1.0" encoding="utf-8"?>
+<p:notes xmlns:a="http://schemas.openxmlformats.org/drawingml/2006/main" xmlns:p="http://schemas.openxmlformats.org/presentationml/2006/main" xmlns:r="http://schemas.openxmlformats.org/officeDocument/2006/relationships">
+  <p:cSld>
+    <p:spTree>
+      <p:nvGrpSpPr>
+        <p:cNvPr id="1" name=""/>
+        <p:cNvGrpSpPr/>
+        <p:nvPr/>
+      </p:nvGrpSpPr>
+      <p:grpSpPr>
+        <a:xfrm>
+          <a:off x="0" y="0"/>
+          <a:ext cx="0" cy="0"/>
+          <a:chOff x="0" y="0"/>
+          <a:chExt cx="0" cy="0"/>
+        </a:xfrm>
+      </p:grpSpPr>
+      <p:sp>
+        <p:nvSpPr>
+          <p:cNvPr id="2" name="Slide Image Placeholder 1"/>
+          <p:cNvSpPr>
+            <a:spLocks noGrp="1"/>
+          </p:cNvSpPr>
+          <p:nvPr>
+            <p:ph type="sldImg" idx="2"/>
+          </p:nvPr>
+        </p:nvSpPr>
+        <p:spPr/>
+      </p:sp>
+      <p:sp>
+        <p:nvSpPr>
+          <p:cNvPr id="3" name="Notes Placeholder 2"/>
+          <p:cNvSpPr>
+            <a:spLocks noGrp="1"/>
+          </p:cNvSpPr>
+          <p:nvPr>
+            <p:ph type="body" idx="3" sz="quarter"/>
+          </p:nvPr>
+        </p:nvSpPr>
+        <p:spPr/>
+        <p:txBody>
+          <a:bodyPr/>
+          <a:lstStyle/>
+          <a:p>
+            <a:r>
+              <a:t>These short animations go with this week's reading. Students can watch them before class to preview the mechanisms, or afterwards to review: NULL: why = NULL finds nothing (1:20); What does one row mean after a join? (1:16); Counting workload, including zero (1:28). Each video is silent with on-screen captions and a subtitle file, and is linked from the Week 2 README. The diagrams are schematic illustrations, not benchmarks.</a:t>
+            </a:r>
+          </a:p>
+        </p:txBody>
+      </p:sp>
+      <p:sp>
+        <p:nvSpPr>
+          <p:cNvPr id="4" name="Slide Number Placeholder 3"/>
+          <p:cNvSpPr>
+            <a:spLocks noGrp="1"/>
+          </p:cNvSpPr>
+          <p:nvPr>
+            <p:ph type="sldNum" idx="5" sz="quarter"/>
+          </p:nvPr>
+        </p:nvSpPr>
+        <p:spPr/>
+      </p:sp>
+    </p:spTree>
+  </p:cSld>
+  <p:clrMapOvr>
+    <a:masterClrMapping/>
   </p:clrMapOvr>
 </p:notes>
 </file>
@@ -14534,6 +14605,451 @@
       </p:ext>
     </p:extLst>
   </p:cSld>
+</p:sld>
+</file>
+
+<file path=ppt/slides/slide22.xml><?xml version="1.0" encoding="utf-8"?>
+<p:sld xmlns:a="http://schemas.openxmlformats.org/drawingml/2006/main" xmlns:p="http://schemas.openxmlformats.org/presentationml/2006/main" xmlns:r="http://schemas.openxmlformats.org/officeDocument/2006/relationships">
+  <p:cSld>
+    <p:bg>
+      <p:bgPr>
+        <a:solidFill>
+          <a:srgbClr val="FCFCFA"/>
+        </a:solidFill>
+        <a:effectLst/>
+      </p:bgPr>
+    </p:bg>
+    <p:spTree>
+      <p:nvGrpSpPr>
+        <p:cNvPr id="1" name=""/>
+        <p:cNvGrpSpPr/>
+        <p:nvPr/>
+      </p:nvGrpSpPr>
+      <p:grpSpPr/>
+      <p:sp>
+        <p:nvSpPr>
+          <p:cNvPr id="2" name="cst4714-videos"/>
+          <p:cNvSpPr txBox="1"/>
+          <p:nvPr/>
+        </p:nvSpPr>
+        <p:spPr>
+          <a:xfrm>
+            <a:off x="0" y="0"/>
+            <a:ext cx="10" cy="10"/>
+          </a:xfrm>
+          <a:prstGeom prst="rect">
+            <a:avLst/>
+          </a:prstGeom>
+          <a:noFill/>
+        </p:spPr>
+        <p:txBody>
+          <a:bodyPr wrap="square" lIns="0" rIns="0" tIns="0" bIns="0" anchor="t">
+            <a:spAutoFit/>
+          </a:bodyPr>
+          <a:lstStyle/>
+          <a:p>
+            <a:pPr algn="l"/>
+            <a:r>
+              <a:rPr sz="1800" b="0">
+                <a:solidFill>
+                  <a:srgbClr val="111827"/>
+                </a:solidFill>
+                <a:latin typeface="Helvetica Neue"/>
+              </a:rPr>
+              <a:t/>
+            </a:r>
+          </a:p>
+        </p:txBody>
+      </p:sp>
+      <p:sp>
+        <p:nvSpPr>
+          <p:cNvPr id="3" name="eyebrow"/>
+          <p:cNvSpPr txBox="1"/>
+          <p:nvPr/>
+        </p:nvSpPr>
+        <p:spPr>
+          <a:xfrm>
+            <a:off x="609600" y="295275"/>
+            <a:ext cx="5715000" cy="228600"/>
+          </a:xfrm>
+          <a:prstGeom prst="rect">
+            <a:avLst/>
+          </a:prstGeom>
+          <a:noFill/>
+        </p:spPr>
+        <p:txBody>
+          <a:bodyPr wrap="square" lIns="0" rIns="0" tIns="0" bIns="0" anchor="t">
+            <a:spAutoFit/>
+          </a:bodyPr>
+          <a:lstStyle/>
+          <a:p>
+            <a:pPr algn="l"/>
+            <a:r>
+              <a:rPr sz="1400" b="1">
+                <a:solidFill>
+                  <a:srgbClr val="BF3E05"/>
+                </a:solidFill>
+                <a:latin typeface="Helvetica Neue"/>
+              </a:rPr>
+              <a:t>WEEK 02  /  CST4714</a:t>
+            </a:r>
+          </a:p>
+        </p:txBody>
+      </p:sp>
+      <p:sp>
+        <p:nvSpPr>
+          <p:cNvPr id="4" name="slide-title"/>
+          <p:cNvSpPr txBox="1"/>
+          <p:nvPr/>
+        </p:nvSpPr>
+        <p:spPr>
+          <a:xfrm>
+            <a:off x="609600" y="619125"/>
+            <a:ext cx="10972800" cy="628650"/>
+          </a:xfrm>
+          <a:prstGeom prst="rect">
+            <a:avLst/>
+          </a:prstGeom>
+          <a:noFill/>
+        </p:spPr>
+        <p:txBody>
+          <a:bodyPr wrap="square" lIns="0" rIns="0" tIns="0" bIns="0" anchor="t">
+            <a:spAutoFit/>
+          </a:bodyPr>
+          <a:lstStyle/>
+          <a:p>
+            <a:pPr algn="l"/>
+            <a:r>
+              <a:rPr sz="3600" b="1">
+                <a:solidFill>
+                  <a:srgbClr val="111827"/>
+                </a:solidFill>
+                <a:latin typeface="Helvetica Neue"/>
+              </a:rPr>
+              <a:t>This week's videos</a:t>
+            </a:r>
+          </a:p>
+        </p:txBody>
+      </p:sp>
+      <p:sp>
+        <p:nvSpPr>
+          <p:cNvPr id="5" name="Rectangle 4"/>
+          <p:cNvSpPr/>
+          <p:nvPr/>
+        </p:nvSpPr>
+        <p:spPr>
+          <a:xfrm>
+            <a:off x="609600" y="1295400"/>
+            <a:ext cx="10972800" cy="9525"/>
+          </a:xfrm>
+          <a:prstGeom prst="rect">
+            <a:avLst/>
+          </a:prstGeom>
+          <a:solidFill>
+            <a:srgbClr val="CBD5E1"/>
+          </a:solidFill>
+          <a:ln>
+            <a:noFill/>
+          </a:ln>
+        </p:spPr>
+        <p:style>
+          <a:lnRef idx="1">
+            <a:schemeClr val="accent1"/>
+          </a:lnRef>
+          <a:fillRef idx="3">
+            <a:schemeClr val="accent1"/>
+          </a:fillRef>
+          <a:effectRef idx="2">
+            <a:schemeClr val="accent1"/>
+          </a:effectRef>
+          <a:fontRef idx="minor">
+            <a:schemeClr val="lt1"/>
+          </a:fontRef>
+        </p:style>
+        <p:txBody>
+          <a:bodyPr rtlCol="0" anchor="ctr"/>
+          <a:lstStyle/>
+          <a:p>
+            <a:pPr algn="ctr"/>
+          </a:p>
+        </p:txBody>
+      </p:sp>
+      <p:sp>
+        <p:nvSpPr>
+          <p:cNvPr id="6" name="slide-number"/>
+          <p:cNvSpPr txBox="1"/>
+          <p:nvPr/>
+        </p:nvSpPr>
+        <p:spPr>
+          <a:xfrm>
+            <a:off x="11125200" y="6467475"/>
+            <a:ext cx="457200" cy="190500"/>
+          </a:xfrm>
+          <a:prstGeom prst="rect">
+            <a:avLst/>
+          </a:prstGeom>
+          <a:noFill/>
+        </p:spPr>
+        <p:txBody>
+          <a:bodyPr wrap="square" lIns="0" rIns="0" tIns="0" bIns="0" anchor="t">
+            <a:spAutoFit/>
+          </a:bodyPr>
+          <a:lstStyle/>
+          <a:p>
+            <a:pPr algn="r"/>
+            <a:r>
+              <a:rPr sz="1200" b="0">
+                <a:solidFill>
+                  <a:srgbClr val="475569"/>
+                </a:solidFill>
+                <a:latin typeface="Helvetica Neue"/>
+              </a:rPr>
+              <a:t>22</a:t>
+            </a:r>
+          </a:p>
+        </p:txBody>
+      </p:sp>
+      <p:pic>
+        <p:nvPicPr>
+          <p:cNvPr id="7" name="video-thumb-1" descr="01_null_logic.png">
+            <a:hlinkClick r:id="rId3"/>
+          </p:cNvPr>
+          <p:cNvPicPr>
+            <a:picLocks noChangeAspect="1"/>
+          </p:cNvPicPr>
+          <p:nvPr/>
+        </p:nvPicPr>
+        <p:blipFill>
+          <a:blip r:embed="rId2"/>
+          <a:stretch>
+            <a:fillRect/>
+          </a:stretch>
+        </p:blipFill>
+        <p:spPr>
+          <a:xfrm>
+            <a:off x="609600" y="1600200"/>
+            <a:ext cx="3454400" cy="1943100"/>
+          </a:xfrm>
+          <a:prstGeom prst="rect">
+            <a:avLst/>
+          </a:prstGeom>
+          <a:ln>
+            <a:solidFill>
+              <a:srgbClr val="CBD5E1"/>
+            </a:solidFill>
+          </a:ln>
+        </p:spPr>
+      </p:pic>
+      <p:sp>
+        <p:nvSpPr>
+          <p:cNvPr id="8" name="video-title-1"/>
+          <p:cNvSpPr txBox="1"/>
+          <p:nvPr/>
+        </p:nvSpPr>
+        <p:spPr>
+          <a:xfrm>
+            <a:off x="609600" y="3623300"/>
+            <a:ext cx="3454400" cy="520000"/>
+          </a:xfrm>
+          <a:prstGeom prst="rect">
+            <a:avLst/>
+          </a:prstGeom>
+          <a:noFill/>
+        </p:spPr>
+        <p:txBody>
+          <a:bodyPr wrap="square" lIns="0" rIns="0" tIns="0" bIns="0" anchor="t">
+            <a:spAutoFit/>
+          </a:bodyPr>
+          <a:lstStyle/>
+          <a:p>
+            <a:pPr algn="l"/>
+            <a:r>
+              <a:rPr sz="1500" b="1">
+                <a:solidFill>
+                  <a:srgbClr val="111827"/>
+                </a:solidFill>
+                <a:latin typeface="Helvetica Neue"/>
+                <a:hlinkClick r:id="rId3"/>
+              </a:rPr>
+              <a:t>▶ NULL: why = NULL finds nothing  (1:20)</a:t>
+            </a:r>
+          </a:p>
+        </p:txBody>
+      </p:sp>
+      <p:pic>
+        <p:nvPicPr>
+          <p:cNvPr id="9" name="video-thumb-2" descr="02_join_grain.png">
+            <a:hlinkClick r:id="rId5"/>
+          </p:cNvPr>
+          <p:cNvPicPr>
+            <a:picLocks noChangeAspect="1"/>
+          </p:cNvPicPr>
+          <p:nvPr/>
+        </p:nvPicPr>
+        <p:blipFill>
+          <a:blip r:embed="rId4"/>
+          <a:stretch>
+            <a:fillRect/>
+          </a:stretch>
+        </p:blipFill>
+        <p:spPr>
+          <a:xfrm>
+            <a:off x="4368800" y="1600200"/>
+            <a:ext cx="3454400" cy="1943100"/>
+          </a:xfrm>
+          <a:prstGeom prst="rect">
+            <a:avLst/>
+          </a:prstGeom>
+          <a:ln>
+            <a:solidFill>
+              <a:srgbClr val="CBD5E1"/>
+            </a:solidFill>
+          </a:ln>
+        </p:spPr>
+      </p:pic>
+      <p:sp>
+        <p:nvSpPr>
+          <p:cNvPr id="10" name="video-title-2"/>
+          <p:cNvSpPr txBox="1"/>
+          <p:nvPr/>
+        </p:nvSpPr>
+        <p:spPr>
+          <a:xfrm>
+            <a:off x="4368800" y="3623300"/>
+            <a:ext cx="3454400" cy="520000"/>
+          </a:xfrm>
+          <a:prstGeom prst="rect">
+            <a:avLst/>
+          </a:prstGeom>
+          <a:noFill/>
+        </p:spPr>
+        <p:txBody>
+          <a:bodyPr wrap="square" lIns="0" rIns="0" tIns="0" bIns="0" anchor="t">
+            <a:spAutoFit/>
+          </a:bodyPr>
+          <a:lstStyle/>
+          <a:p>
+            <a:pPr algn="l"/>
+            <a:r>
+              <a:rPr sz="1500" b="1">
+                <a:solidFill>
+                  <a:srgbClr val="111827"/>
+                </a:solidFill>
+                <a:latin typeface="Helvetica Neue"/>
+                <a:hlinkClick r:id="rId5"/>
+              </a:rPr>
+              <a:t>▶ What does one row mean after a join?  (1:16)</a:t>
+            </a:r>
+          </a:p>
+        </p:txBody>
+      </p:sp>
+      <p:pic>
+        <p:nvPicPr>
+          <p:cNvPr id="11" name="video-thumb-3" descr="03_zero_counts.png">
+            <a:hlinkClick r:id="rId7"/>
+          </p:cNvPr>
+          <p:cNvPicPr>
+            <a:picLocks noChangeAspect="1"/>
+          </p:cNvPicPr>
+          <p:nvPr/>
+        </p:nvPicPr>
+        <p:blipFill>
+          <a:blip r:embed="rId6"/>
+          <a:stretch>
+            <a:fillRect/>
+          </a:stretch>
+        </p:blipFill>
+        <p:spPr>
+          <a:xfrm>
+            <a:off x="8128000" y="1600200"/>
+            <a:ext cx="3454400" cy="1943100"/>
+          </a:xfrm>
+          <a:prstGeom prst="rect">
+            <a:avLst/>
+          </a:prstGeom>
+          <a:ln>
+            <a:solidFill>
+              <a:srgbClr val="CBD5E1"/>
+            </a:solidFill>
+          </a:ln>
+        </p:spPr>
+      </p:pic>
+      <p:sp>
+        <p:nvSpPr>
+          <p:cNvPr id="12" name="video-title-3"/>
+          <p:cNvSpPr txBox="1"/>
+          <p:nvPr/>
+        </p:nvSpPr>
+        <p:spPr>
+          <a:xfrm>
+            <a:off x="8128000" y="3623300"/>
+            <a:ext cx="3454400" cy="520000"/>
+          </a:xfrm>
+          <a:prstGeom prst="rect">
+            <a:avLst/>
+          </a:prstGeom>
+          <a:noFill/>
+        </p:spPr>
+        <p:txBody>
+          <a:bodyPr wrap="square" lIns="0" rIns="0" tIns="0" bIns="0" anchor="t">
+            <a:spAutoFit/>
+          </a:bodyPr>
+          <a:lstStyle/>
+          <a:p>
+            <a:pPr algn="l"/>
+            <a:r>
+              <a:rPr sz="1500" b="1">
+                <a:solidFill>
+                  <a:srgbClr val="111827"/>
+                </a:solidFill>
+                <a:latin typeface="Helvetica Neue"/>
+                <a:hlinkClick r:id="rId7"/>
+              </a:rPr>
+              <a:t>▶ Counting workload, including zero  (1:28)</a:t>
+            </a:r>
+          </a:p>
+        </p:txBody>
+      </p:sp>
+      <p:sp>
+        <p:nvSpPr>
+          <p:cNvPr id="13" name="videos-note"/>
+          <p:cNvSpPr txBox="1"/>
+          <p:nvPr/>
+        </p:nvSpPr>
+        <p:spPr>
+          <a:xfrm>
+            <a:off x="609600" y="4243300"/>
+            <a:ext cx="10372800" cy="300000"/>
+          </a:xfrm>
+          <a:prstGeom prst="rect">
+            <a:avLst/>
+          </a:prstGeom>
+          <a:noFill/>
+        </p:spPr>
+        <p:txBody>
+          <a:bodyPr wrap="square" lIns="0" rIns="0" tIns="0" bIns="0" anchor="t">
+            <a:spAutoFit/>
+          </a:bodyPr>
+          <a:lstStyle/>
+          <a:p>
+            <a:pPr algn="l"/>
+            <a:r>
+              <a:rPr sz="1200" b="0">
+                <a:solidFill>
+                  <a:srgbClr val="475569"/>
+                </a:solidFill>
+                <a:latin typeface="Helvetica Neue"/>
+              </a:rPr>
+              <a:t>Click a thumbnail to play on GitHub. Silent, with captions and .srt subtitles; diagrams are schematic.</a:t>
+            </a:r>
+          </a:p>
+        </p:txBody>
+      </p:sp>
+    </p:spTree>
+  </p:cSld>
+  <p:clrMapOvr>
+    <a:masterClrMapping/>
+  </p:clrMapOvr>
 </p:sld>
 </file>
 

--- a/week_02/week_02_relational_algebra_sql_review.pptx
+++ b/week_02/week_02_relational_algebra_sql_review.pptx
@@ -463,44 +463,34 @@
           <a:lstStyle xmlns:a="http://schemas.openxmlformats.org/drawingml/2006/main"/>
           <a:p xmlns:a="http://schemas.openxmlformats.org/drawingml/2006/main">
             <a:r>
-              <a:t>This week we will use SQL to answer questions about a small service desk. SQL stands for Structured Query Language. It lets us describe the data we want and the changes we want the database to make. We do not have to specify the exact physical steps the database should use to find each row. That separation is one reason SQL remains useful across different database systems.</a:t>
-            </a:r>
-          </a:p>
-          <a:p xmlns:a="http://schemas.openxmlformats.org/drawingml/2006/main">
-            <a:r>
-              <a:t/>
-            </a:r>
-          </a:p>
-          <a:p xmlns:a="http://schemas.openxmlformats.org/drawingml/2006/main">
-            <a:r>
-              <a:t>We will begin with finding requests that need attention. Then we will repair a staff report that loses unassigned requests, count work for staff members who may have no assignments, and test a priority change without keeping it. These are ordinary database tasks with consequences for the people who use the reports.</a:t>
-            </a:r>
-          </a:p>
-          <a:p xmlns:a="http://schemas.openxmlformats.org/drawingml/2006/main">
-            <a:r>
-              <a:t/>
-            </a:r>
-          </a:p>
-          <a:p xmlns:a="http://schemas.openxmlformats.org/drawingml/2006/main">
-            <a:r>
-              <a:t>The complete course dataset contains eight users, twelve tickets, and twenty-one ticket events. A ticket is a request for help. An event records something that happened to a ticket. The notebook begins with a smaller demonstration dataset, so its early counts are different. Before either lab, we will use the section labeled complete Week 2 lab dataset, or the PostgreSQL setup file linked in the weekly guide.</a:t>
-            </a:r>
-          </a:p>
-          <a:p xmlns:a="http://schemas.openxmlformats.org/drawingml/2006/main">
-            <a:r>
-              <a:t/>
-            </a:r>
-          </a:p>
-          <a:p xmlns:a="http://schemas.openxmlformats.org/drawingml/2006/main">
-            <a:r>
-              <a:t>We will rebuild the syntax as we go. Chapter 2 explains the same ideas with additional examples. Each lab has one SQL-file submission. Short explanations belong beside the relevant query as SQL comments, which begin with two hyphens.</a:t>
-            </a:r>
-          </a:p>
-          <a:p xmlns:a="http://schemas.openxmlformats.org/drawingml/2006/main">
-            <a:r>
-              <a:t/>
-            </a:r>
-          </a:p>
+              <a:t>Welcome to Week 2. This week is a SQL review. I am not assuming you remember SQL from an earlier course, so we will rebuild the syntax as we go.</a:t>
+            </a:r>
+          </a:p>
+          <a:p xmlns:a="http://schemas.openxmlformats.org/drawingml/2006/main"/>
+          <a:p xmlns:a="http://schemas.openxmlformats.org/drawingml/2006/main">
+            <a:r>
+              <a:t>SQL stands for Structured Query Language. The useful thing about it is that you describe the result you want, and the database works out how to find it. That separation is why the same SQL keeps working across different database systems.</a:t>
+            </a:r>
+          </a:p>
+          <a:p xmlns:a="http://schemas.openxmlformats.org/drawingml/2006/main"/>
+          <a:p xmlns:a="http://schemas.openxmlformats.org/drawingml/2006/main">
+            <a:r>
+              <a:t>Look at the subtitle: finding requests, checking reports, and testing a careful data change. Those are the jobs this week. On Day 1 we find requests that need attention. On Day 2 we repair a staff report that loses unassigned requests, count work for staff who may have no assignments, and test a priority change without keeping it. Ordinary tasks, but a wrong report means a real request gets ignored.</a:t>
+            </a:r>
+          </a:p>
+          <a:p xmlns:a="http://schemas.openxmlformats.org/drawingml/2006/main"/>
+          <a:p xmlns:a="http://schemas.openxmlformats.org/drawingml/2006/main">
+            <a:r>
+              <a:t>Our data is the Metro Support service desk: eight users, twelve tickets, and twenty-one ticket events. A ticket is a request for help. An event records something that happened to a ticket. One warning about the notebook. Its early demonstration data reuses some of the same ticket numbers with different details, so do not compare those results to the lab. Before either lab, run the section called Use the Complete Week 2 Lab Dataset.</a:t>
+            </a:r>
+          </a:p>
+          <a:p xmlns:a="http://schemas.openxmlformats.org/drawingml/2006/main"/>
+          <a:p xmlns:a="http://schemas.openxmlformats.org/drawingml/2006/main">
+            <a:r>
+              <a:t>Each lab is one SQL file, and your explanations go right next to the query, as SQL comments that start with two hyphens.</a:t>
+            </a:r>
+          </a:p>
+          <a:p xmlns:a="http://schemas.openxmlformats.org/drawingml/2006/main"/>
           <a:p xmlns:a="http://schemas.openxmlformats.org/drawingml/2006/main">
             <a:r>
               <a:t>[Sources]</a:t>
@@ -583,54 +573,34 @@
           <a:lstStyle xmlns:a="http://schemas.openxmlformats.org/drawingml/2006/main"/>
           <a:p xmlns:a="http://schemas.openxmlformats.org/drawingml/2006/main">
             <a:r>
-              <a:t>The first lab asks you to find requests that need attention. Use the complete fixture with eight users, twelve tickets, and twenty-one events. In Supabase, the linked setup creates the metro_support practice schema. In the notebook, use the section for the complete Week 2 dataset. The early notebook demonstration is smaller and will not produce the same counts.</a:t>
-            </a:r>
-          </a:p>
-          <a:p xmlns:a="http://schemas.openxmlformats.org/drawingml/2006/main">
-            <a:r>
-              <a:t/>
-            </a:r>
-          </a:p>
-          <a:p xmlns:a="http://schemas.openxmlformats.org/drawingml/2006/main">
-            <a:r>
-              <a:t>Write three queries. The first finds active requests with high or urgent priority and orders them newest first. The second finds every unassigned request. The third finds active requests reported by residents in the Harbor neighborhood. The lab includes a requester-join example that you can adapt for the third query.</a:t>
-            </a:r>
-          </a:p>
-          <a:p xmlns:a="http://schemas.openxmlformats.org/drawingml/2006/main">
-            <a:r>
-              <a:t/>
-            </a:r>
-          </a:p>
-          <a:p xmlns:a="http://schemas.openxmlformats.org/drawingml/2006/main">
-            <a:r>
-              <a:t>Then investigate the supplied condition that compares assignee_id with NULL using ordinary equality. Explain why its empty result does not mean every ticket has an assignee. Check the Harbor query against the CSV files by identifying one ticket that belongs and one that does not, with a reason for each.</a:t>
-            </a:r>
-          </a:p>
-          <a:p xmlns:a="http://schemas.openxmlformats.org/drawingml/2006/main">
-            <a:r>
-              <a:t/>
-            </a:r>
-          </a:p>
-          <a:p xmlns:a="http://schemas.openxmlformats.org/drawingml/2006/main">
-            <a:r>
-              <a:t>Your submission is week_02_sql_review.sql in Brightspace. Put the brief explanations in SQL comments. You do not need a separate report, screenshot, or GitHub repository. Work individually, and use the chapter or the worked examples when you need a reminder of syntax.</a:t>
-            </a:r>
-          </a:p>
-          <a:p xmlns:a="http://schemas.openxmlformats.org/drawingml/2006/main">
-            <a:r>
-              <a:t/>
-            </a:r>
-          </a:p>
-          <a:p xmlns:a="http://schemas.openxmlformats.org/drawingml/2006/main">
-            <a:r>
-              <a:t>The task is finished when the queries answer the specified questions and your comments explain the supplied error and the independent check. The optional extension is ungraded and adds no required submission.</a:t>
-            </a:r>
-          </a:p>
-          <a:p xmlns:a="http://schemas.openxmlformats.org/drawingml/2006/main">
-            <a:r>
-              <a:t/>
-            </a:r>
-          </a:p>
+              <a:t>Here is Lab 1, Find the Requests That Need Attention. Work individually, with the complete fixture: eight users, twelve tickets, twenty-one events.</a:t>
+            </a:r>
+          </a:p>
+          <a:p xmlns:a="http://schemas.openxmlformats.org/drawingml/2006/main"/>
+          <a:p xmlns:a="http://schemas.openxmlformats.org/drawingml/2006/main">
+            <a:r>
+              <a:t>The main path is the Colab notebook. Open it, save a copy in Drive, and run the cells through Use the Complete Week 2 Lab Dataset. You do not need a Supabase account this week. If you already have a personal Supabase practice project, you can run the setup file in its SQL Editor instead, and it resets the metro_support practice schema. Either way, if your counts are not eight, twelve, and twenty-one, stop and fix that first, because every answer after it depends on the data.</a:t>
+            </a:r>
+          </a:p>
+          <a:p xmlns:a="http://schemas.openxmlformats.org/drawingml/2006/main"/>
+          <a:p xmlns:a="http://schemas.openxmlformats.org/drawingml/2006/main">
+            <a:r>
+              <a:t>Write three queries. First, active requests with high or urgent priority, newest first. Second, every unassigned request, using IS NULL. Third, active requests reported by residents in the Harbor neighborhood. The lab gives you a requester-join example to adapt for that one.</a:t>
+            </a:r>
+          </a:p>
+          <a:p xmlns:a="http://schemas.openxmlformats.org/drawingml/2006/main"/>
+          <a:p xmlns:a="http://schemas.openxmlformats.org/drawingml/2006/main">
+            <a:r>
+              <a:t>Then investigate the colleague's query that compares assignee_id to NULL with an equals sign, and explain why its empty result does not mean every ticket is assigned. And check your Harbor query against the CSV files: name one ticket that belongs and one that does not, with the reason for each.</a:t>
+            </a:r>
+          </a:p>
+          <a:p xmlns:a="http://schemas.openxmlformats.org/drawingml/2006/main"/>
+          <a:p xmlns:a="http://schemas.openxmlformats.org/drawingml/2006/main">
+            <a:r>
+              <a:t>Submit week_02_sql_review.sql in Brightspace, with your explanations as SQL comments. Copy in the SQL itself, not the Python wrapper around it. No screenshot, no separate report, no GitHub repository. If you finish early, the extension is optional and ungraded.</a:t>
+            </a:r>
+          </a:p>
+          <a:p xmlns:a="http://schemas.openxmlformats.org/drawingml/2006/main"/>
           <a:p xmlns:a="http://schemas.openxmlformats.org/drawingml/2006/main">
             <a:r>
               <a:t>[Sources]</a:t>
@@ -713,54 +683,34 @@
           <a:lstStyle xmlns:a="http://schemas.openxmlformats.org/drawingml/2006/main"/>
           <a:p xmlns:a="http://schemas.openxmlformats.org/drawingml/2006/main">
             <a:r>
-              <a:t>This figure connects the assignee join to relational algebra. The full tickets relation has twelve rows, and the users relation has eight. A Cartesian product pairs every ticket with every user, so it contains ninety-six candidate pairs. Most of those pairs do not describe an assignment.</a:t>
-            </a:r>
-          </a:p>
-          <a:p xmlns:a="http://schemas.openxmlformats.org/drawingml/2006/main">
-            <a:r>
-              <a:t/>
-            </a:r>
-          </a:p>
-          <a:p xmlns:a="http://schemas.openxmlformats.org/drawingml/2006/main">
-            <a:r>
-              <a:t>The condition compares the ticket's assignee_id with the user's user_id. The Greek letter theta represents that condition. Selection keeps the pairs where the condition is true. A theta join is a join using a specified condition, and equality gives us the equijoin used here.</a:t>
-            </a:r>
-          </a:p>
-          <a:p xmlns:a="http://schemas.openxmlformats.org/drawingml/2006/main">
-            <a:r>
-              <a:t/>
-            </a:r>
-          </a:p>
-          <a:p xmlns:a="http://schemas.openxmlformats.org/drawingml/2006/main">
-            <a:r>
-              <a:t>For this assignee relationship, ten ticket-user pairs match. Each assigned ticket refers to one user. The two unassigned tickets have NULL assignee IDs and do not produce matching pairs under ordinary equality. That result explains why an inner-join dashboard can lose requests even when the tickets table contains them.</a:t>
-            </a:r>
-          </a:p>
-          <a:p xmlns:a="http://schemas.openxmlformats.org/drawingml/2006/main">
-            <a:r>
-              <a:t/>
-            </a:r>
-          </a:p>
-          <a:p xmlns:a="http://schemas.openxmlformats.org/drawingml/2006/main">
-            <a:r>
-              <a:t>The ninety-six-pair diagram describes the operation's logical meaning. It does not claim that PostgreSQL physically creates all ninety-six pairs before filtering. The optimizer can choose a different implementation, such as an index lookup or a hash join, while preserving the required result.</a:t>
-            </a:r>
-          </a:p>
-          <a:p xmlns:a="http://schemas.openxmlformats.org/drawingml/2006/main">
-            <a:r>
-              <a:t/>
-            </a:r>
-          </a:p>
-          <a:p xmlns:a="http://schemas.openxmlformats.org/drawingml/2006/main">
-            <a:r>
-              <a:t>The distinction between logical meaning and physical execution is useful throughout database administration. Today we use the logical model to explain missing rows. Later, when we inspect query plans, we will ask how the database carries out the operation and what work it performs.</a:t>
-            </a:r>
-          </a:p>
-          <a:p xmlns:a="http://schemas.openxmlformats.org/drawingml/2006/main">
-            <a:r>
-              <a:t/>
-            </a:r>
-          </a:p>
+              <a:t>Welcome back. Today is about relationships, summaries, and safe changes, and we start with a picture of what a join actually means.</a:t>
+            </a:r>
+          </a:p>
+          <a:p xmlns:a="http://schemas.openxmlformats.org/drawingml/2006/main"/>
+          <a:p xmlns:a="http://schemas.openxmlformats.org/drawingml/2006/main">
+            <a:r>
+              <a:t>Look at the figure. The tickets relation has twelve rows and the users relation has eight. A Cartesian product pairs every ticket with every user. Twelve times eight is ninety-six candidate pairs. Most of them are nonsense: a ticket paired with someone who has nothing to do with it.</a:t>
+            </a:r>
+          </a:p>
+          <a:p xmlns:a="http://schemas.openxmlformats.org/drawingml/2006/main"/>
+          <a:p xmlns:a="http://schemas.openxmlformats.org/drawingml/2006/main">
+            <a:r>
+              <a:t>Now apply the condition at the bottom of the slide: tickets.assignee_id equals users.user_id. In the notation, the Greek letter theta stands for that condition, and selection keeps only the pairs where it is true. A join with a stated condition is a theta join, and when the condition is equality, we call it an equijoin.</a:t>
+            </a:r>
+          </a:p>
+          <a:p xmlns:a="http://schemas.openxmlformats.org/drawingml/2006/main"/>
+          <a:p xmlns:a="http://schemas.openxmlformats.org/drawingml/2006/main">
+            <a:r>
+              <a:t>For the assignee relationship, ten pairs survive. Each assigned ticket matches one user. And the two unassigned tickets? Their assignee_id is NULL, NULL compared with anything is unknown, so they produce no pair at all. That is exactly how an inner-join dashboard loses requests even though the tickets table still has them.</a:t>
+            </a:r>
+          </a:p>
+          <a:p xmlns:a="http://schemas.openxmlformats.org/drawingml/2006/main"/>
+          <a:p xmlns:a="http://schemas.openxmlformats.org/drawingml/2006/main">
+            <a:r>
+              <a:t>One caution. Ninety-six pairs is the logical meaning. PostgreSQL does not physically build all ninety-six and then filter. The optimizer may use an index lookup or a hash join, as long as the result is the same. Today we use the meaning to explain missing rows. Later, when we read query plans, we will look at how the work is actually done.</a:t>
+            </a:r>
+          </a:p>
+          <a:p xmlns:a="http://schemas.openxmlformats.org/drawingml/2006/main"/>
           <a:p xmlns:a="http://schemas.openxmlformats.org/drawingml/2006/main">
             <a:r>
               <a:t>[Sources]</a:t>
@@ -848,54 +798,28 @@
           <a:lstStyle xmlns:a="http://schemas.openxmlformats.org/drawingml/2006/main"/>
           <a:p xmlns:a="http://schemas.openxmlformats.org/drawingml/2006/main">
             <a:r>
-              <a:t>Now the reporting question is different. We want every ticket, together with an assignee name when one exists. The previous inner-join pattern is not sufficient for that requirement. It requires a matching pair and therefore removes an unassigned ticket.</a:t>
-            </a:r>
-          </a:p>
-          <a:p xmlns:a="http://schemas.openxmlformats.org/drawingml/2006/main">
-            <a:r>
-              <a:t/>
-            </a:r>
-          </a:p>
-          <a:p xmlns:a="http://schemas.openxmlformats.org/drawingml/2006/main">
-            <a:r>
-              <a:t>With tickets on the left, a LEFT JOIN keeps each ticket even when there is no matching user on the right. For the unmatched ticket, the right-side output columns contain NULL. The ticket's own identifier and subject remain available. We do not create a fake user or alter the stored data to achieve this result.</a:t>
-            </a:r>
-          </a:p>
-          <a:p xmlns:a="http://schemas.openxmlformats.org/drawingml/2006/main">
-            <a:r>
-              <a:t/>
-            </a:r>
-          </a:p>
-          <a:p xmlns:a="http://schemas.openxmlformats.org/drawingml/2006/main">
-            <a:r>
-              <a:t>On the complete fixture, an inner join from assignee_id to user_id returns ten tickets and omits 1004 and 1009. A left join without a later excluding filter returns all twelve. Those two missing identifiers make the difference easy to test.</a:t>
-            </a:r>
-          </a:p>
-          <a:p xmlns:a="http://schemas.openxmlformats.org/drawingml/2006/main">
-            <a:r>
-              <a:t/>
-            </a:r>
-          </a:p>
-          <a:p xmlns:a="http://schemas.openxmlformats.org/drawingml/2006/main">
-            <a:r>
-              <a:t>There is one important qualification. A later WHERE condition can still remove rows. If we put a condition on the right-side user in WHERE, the unmatched row may fail that condition. When the condition defines which right-side rows are eligible to match while preserving the left side, it belongs in ON or in a filtered input query.</a:t>
-            </a:r>
-          </a:p>
-          <a:p xmlns:a="http://schemas.openxmlformats.org/drawingml/2006/main">
-            <a:r>
-              <a:t/>
-            </a:r>
-          </a:p>
-          <a:p xmlns:a="http://schemas.openxmlformats.org/drawingml/2006/main">
-            <a:r>
-              <a:t>The repair depends on the report's requirement. An inner join is appropriate when the question requires an existing assignment. A left join is appropriate for an all-ticket report that must show unassigned work as well.</a:t>
-            </a:r>
-          </a:p>
-          <a:p xmlns:a="http://schemas.openxmlformats.org/drawingml/2006/main">
-            <a:r>
-              <a:t/>
-            </a:r>
-          </a:p>
+              <a:t>So here is the reporting question that exposes the problem. We want every ticket, with the assignee's name when there is one. The inner join on the left cannot do that. It keeps only matching pairs, so it omits 1004 and 1009, the two tickets with a NULL assignee_id. The table holds twelve tickets, and the dashboard quietly shows ten.</a:t>
+            </a:r>
+          </a:p>
+          <a:p xmlns:a="http://schemas.openxmlformats.org/drawingml/2006/main"/>
+          <a:p xmlns:a="http://schemas.openxmlformats.org/drawingml/2006/main">
+            <a:r>
+              <a:t>The left join on the right fixes this. With tickets on the left side, a LEFT JOIN keeps every ticket, even when no user matches on the right. For an unmatched ticket, the user columns come back NULL, while the ticket's own ID and subject stay. Run it on the full fixture and you get all twelve. We did not invent a fake user called Unassigned, and we did not touch the stored data. The fix is in the query.</a:t>
+            </a:r>
+          </a:p>
+          <a:p xmlns:a="http://schemas.openxmlformats.org/drawingml/2006/main"/>
+          <a:p xmlns:a="http://schemas.openxmlformats.org/drawingml/2006/main">
+            <a:r>
+              <a:t>There is one catch. A later WHERE clause can still remove rows. Say you add WHERE the user's role is agent. For an unassigned ticket the role is NULL, the condition is unknown, and the row disappears. You are back to an inner join without realizing it. If a condition decides which right-side rows are allowed to match, put it in ON, or filter the right side first.</a:t>
+            </a:r>
+          </a:p>
+          <a:p xmlns:a="http://schemas.openxmlformats.org/drawingml/2006/main"/>
+          <a:p xmlns:a="http://schemas.openxmlformats.org/drawingml/2006/main">
+            <a:r>
+              <a:t>Neither join is wrong. An inner join is right when the question requires an assignment. A left join is right when the report promises every ticket.</a:t>
+            </a:r>
+          </a:p>
+          <a:p xmlns:a="http://schemas.openxmlformats.org/drawingml/2006/main"/>
           <a:p xmlns:a="http://schemas.openxmlformats.org/drawingml/2006/main">
             <a:r>
               <a:t>[Sources]</a:t>
@@ -978,54 +902,34 @@
           <a:lstStyle xmlns:a="http://schemas.openxmlformats.org/drawingml/2006/main"/>
           <a:p xmlns:a="http://schemas.openxmlformats.org/drawingml/2006/main">
             <a:r>
-              <a:t>Ticket 1003 has three events. An event records an action or transition associated with that ticket. When we join tickets to ticket_events on ticket_id, the database forms a pair for each matching event. The output therefore contains three rows with ticket ID 1003.</a:t>
-            </a:r>
-          </a:p>
-          <a:p xmlns:a="http://schemas.openxmlformats.org/drawingml/2006/main">
-            <a:r>
-              <a:t/>
-            </a:r>
-          </a:p>
-          <a:p xmlns:a="http://schemas.openxmlformats.org/drawingml/2006/main">
-            <a:r>
-              <a:t>If the question is to list the ticket's history, those three rows are useful. Each can show the event identifier, event time, and action. If the question is how many tickets exist, counting those three joined rows would answer the wrong question.</a:t>
-            </a:r>
-          </a:p>
-          <a:p xmlns:a="http://schemas.openxmlformats.org/drawingml/2006/main">
-            <a:r>
-              <a:t/>
-            </a:r>
-          </a:p>
-          <a:p xmlns:a="http://schemas.openxmlformats.org/drawingml/2006/main">
-            <a:r>
-              <a:t>COUNT(*) counts result rows. After this join, those rows represent ticket-event pairs. COUNT(DISTINCT t.ticket_id) counts distinct ticket identifiers among the joined pairs, which answers a different question. It still would not count a ticket excluded by an inner join because it had no events. The join and the aggregate both matter.</a:t>
-            </a:r>
-          </a:p>
-          <a:p xmlns:a="http://schemas.openxmlformats.org/drawingml/2006/main">
-            <a:r>
-              <a:t/>
-            </a:r>
-          </a:p>
-          <a:p xmlns:a="http://schemas.openxmlformats.org/drawingml/2006/main">
-            <a:r>
-              <a:t>Another option is EXISTS, which tests whether a matching event exists without adding every event row to the result. That can express a question such as which tickets have any events. Chapter 2 shows the syntax, but the first step is deciding which question we intend to answer.</a:t>
-            </a:r>
-          </a:p>
-          <a:p xmlns:a="http://schemas.openxmlformats.org/drawingml/2006/main">
-            <a:r>
-              <a:t/>
-            </a:r>
-          </a:p>
-          <a:p xmlns:a="http://schemas.openxmlformats.org/drawingml/2006/main">
-            <a:r>
-              <a:t>Repeated values are not automatically a defect. Their meaning depends on the level of detail in the result. We can distinguish source duplication, a legitimate one-to-many relationship, and an incorrect join by following the stable identifiers on both sides.</a:t>
-            </a:r>
-          </a:p>
-          <a:p xmlns:a="http://schemas.openxmlformats.org/drawingml/2006/main">
-            <a:r>
-              <a:t/>
-            </a:r>
-          </a:p>
+              <a:t>Now the other surprise a join can give you: more rows instead of fewer. Ticket 1003 has three events. An event records an action or a change on that ticket. When we join tickets to ticket_events on ticket_id, the database makes a pair for each matching event, so the output has three rows with ticket ID 1003.</a:t>
+            </a:r>
+          </a:p>
+          <a:p xmlns:a="http://schemas.openxmlformats.org/drawingml/2006/main"/>
+          <a:p xmlns:a="http://schemas.openxmlformats.org/drawingml/2006/main">
+            <a:r>
+              <a:t>Is that a bug? It depends on the question. If the question is show me this ticket's history, three rows is exactly right. Each row can show the event ID, the time, and the action. If the question is how many tickets are there, counting those three rows gives the wrong answer.</a:t>
+            </a:r>
+          </a:p>
+          <a:p xmlns:a="http://schemas.openxmlformats.org/drawingml/2006/main"/>
+          <a:p xmlns:a="http://schemas.openxmlformats.org/drawingml/2006/main">
+            <a:r>
+              <a:t>So let's be precise about counting. COUNT star counts result rows, and after this join a row is a ticket-event pair. COUNT DISTINCT t.ticket_id counts distinct ticket IDs among those pairs, which answers a different question. And even that would miss a ticket with no events at all, because the inner join already removed it. The join and the aggregate both matter.</a:t>
+            </a:r>
+          </a:p>
+          <a:p xmlns:a="http://schemas.openxmlformats.org/drawingml/2006/main"/>
+          <a:p xmlns:a="http://schemas.openxmlformats.org/drawingml/2006/main">
+            <a:r>
+              <a:t>A third option is EXISTS. It asks whether at least one matching event exists, without adding every event row to the result. That fits a question like which tickets have any events. The chapter shows the syntax.</a:t>
+            </a:r>
+          </a:p>
+          <a:p xmlns:a="http://schemas.openxmlformats.org/drawingml/2006/main"/>
+          <a:p xmlns:a="http://schemas.openxmlformats.org/drawingml/2006/main">
+            <a:r>
+              <a:t>The general lesson is that repeated values are not automatically a defect. Follow the stable IDs on both sides, and you can tell a real one-to-many relationship from a join that went wrong.</a:t>
+            </a:r>
+          </a:p>
+          <a:p xmlns:a="http://schemas.openxmlformats.org/drawingml/2006/main"/>
           <a:p xmlns:a="http://schemas.openxmlformats.org/drawingml/2006/main">
             <a:r>
               <a:t>[Sources]</a:t>
@@ -1108,54 +1012,46 @@
           <a:lstStyle xmlns:a="http://schemas.openxmlformats.org/drawingml/2006/main"/>
           <a:p xmlns:a="http://schemas.openxmlformats.org/drawingml/2006/main">
             <a:r>
-              <a:t>This query produces a status summary. It starts with ticket rows whose opening date is on or after February first, 2026. Every ticket in this particular fixture satisfies that date condition. The condition still illustrates where source-row filtering happens.</a:t>
-            </a:r>
-          </a:p>
-          <a:p xmlns:a="http://schemas.openxmlformats.org/drawingml/2006/main">
-            <a:r>
-              <a:t/>
-            </a:r>
-          </a:p>
-          <a:p xmlns:a="http://schemas.openxmlformats.org/drawingml/2006/main">
-            <a:r>
-              <a:t>GROUP BY status collects rows with the same status into groups. COUNT(*) counts the ticket rows in each group. AS ticket_count gives that calculated output column a readable name. The result now has one row per status group, rather than one row per ticket.</a:t>
-            </a:r>
-          </a:p>
-          <a:p xmlns:a="http://schemas.openxmlformats.org/drawingml/2006/main">
-            <a:r>
-              <a:t/>
-            </a:r>
-          </a:p>
-          <a:p xmlns:a="http://schemas.openxmlformats.org/drawingml/2006/main">
-            <a:r>
-              <a:t>HAVING applies a condition to each group. It keeps groups with at least two tickets. The complete fixture produces resolved with four, open with three, in_progress with two, and new with two. Closed has one ticket, so HAVING excludes that group. ORDER BY puts larger counts first and uses status to order equal counts consistently.</a:t>
-            </a:r>
-          </a:p>
-          <a:p xmlns:a="http://schemas.openxmlformats.org/drawingml/2006/main">
-            <a:r>
-              <a:t/>
-            </a:r>
-          </a:p>
-          <a:p xmlns:a="http://schemas.openxmlformats.org/drawingml/2006/main">
-            <a:r>
-              <a:t>WHERE and HAVING are not interchangeable. WHERE can filter individual ticket rows before grouping. HAVING can filter a group based on an aggregate such as its count. These are logical meanings; the database may choose an optimized physical execution plan.</a:t>
-            </a:r>
-          </a:p>
-          <a:p xmlns:a="http://schemas.openxmlformats.org/drawingml/2006/main">
-            <a:r>
-              <a:t/>
-            </a:r>
-          </a:p>
-          <a:p xmlns:a="http://schemas.openxmlformats.org/drawingml/2006/main">
-            <a:r>
-              <a:t>A subject column would not describe a whole status group because the group can contain several different subjects. The output columns must identify the group or summarize its contents. That is the same result-grain idea applied to an aggregate query.</a:t>
-            </a:r>
-          </a:p>
-          <a:p xmlns:a="http://schemas.openxmlformats.org/drawingml/2006/main">
-            <a:r>
-              <a:t/>
-            </a:r>
-          </a:p>
+              <a:t>Now summaries. Read this query in the order shown on the right, because each clause works at a different level.</a:t>
+            </a:r>
+          </a:p>
+          <a:p xmlns:a="http://schemas.openxmlformats.org/drawingml/2006/main"/>
+          <a:p xmlns:a="http://schemas.openxmlformats.org/drawingml/2006/main">
+            <a:r>
+              <a:t>WHERE opened_at is on or after February first, 2026. WHERE filters individual ticket rows, before any grouping happens. In this fixture every ticket meets that date, so it removes nothing, but it shows you where row filtering lives.</a:t>
+            </a:r>
+          </a:p>
+          <a:p xmlns:a="http://schemas.openxmlformats.org/drawingml/2006/main"/>
+          <a:p xmlns:a="http://schemas.openxmlformats.org/drawingml/2006/main">
+            <a:r>
+              <a:t>GROUP BY status collects tickets with the same status into one group. COUNT star counts the rows in each group, and AS ticket_count gives that column a readable name. The grain has changed: one row per status, not one row per ticket.</a:t>
+            </a:r>
+          </a:p>
+          <a:p xmlns:a="http://schemas.openxmlformats.org/drawingml/2006/main"/>
+          <a:p xmlns:a="http://schemas.openxmlformats.org/drawingml/2006/main">
+            <a:r>
+              <a:t>HAVING count star at least two filters groups. It looks at each group's count and keeps the groups with two or more. ORDER BY puts bigger counts first and uses status to order equal counts, so the order is stable.</a:t>
+            </a:r>
+          </a:p>
+          <a:p xmlns:a="http://schemas.openxmlformats.org/drawingml/2006/main"/>
+          <a:p xmlns:a="http://schemas.openxmlformats.org/drawingml/2006/main">
+            <a:r>
+              <a:t>The result is resolved 4, open 3, in_progress 2, and new 2. The closed group has one ticket, so HAVING leaves it out.</a:t>
+            </a:r>
+          </a:p>
+          <a:p xmlns:a="http://schemas.openxmlformats.org/drawingml/2006/main"/>
+          <a:p xmlns:a="http://schemas.openxmlformats.org/drawingml/2006/main">
+            <a:r>
+              <a:t>Why two filtering clauses? Because they ask different things. WHERE looks at one ticket row at a time, so it cannot ask about a count. HAVING looks at a whole group, so it can.</a:t>
+            </a:r>
+          </a:p>
+          <a:p xmlns:a="http://schemas.openxmlformats.org/drawingml/2006/main"/>
+          <a:p xmlns:a="http://schemas.openxmlformats.org/drawingml/2006/main">
+            <a:r>
+              <a:t>And one grain point. You cannot just add subject to this SELECT list. A status group contains several different subjects, so no single subject describes it. Every output column has to identify the group or summarize what is in it.</a:t>
+            </a:r>
+          </a:p>
+          <a:p xmlns:a="http://schemas.openxmlformats.org/drawingml/2006/main"/>
           <a:p xmlns:a="http://schemas.openxmlformats.org/drawingml/2006/main">
             <a:r>
               <a:t>[Sources]</a:t>
@@ -1238,54 +1134,34 @@
           <a:lstStyle xmlns:a="http://schemas.openxmlformats.org/drawingml/2006/main"/>
           <a:p xmlns:a="http://schemas.openxmlformats.org/drawingml/2006/main">
             <a:r>
-              <a:t>These two queries find tickets assigned to users whose role is agent. They express the same question in different ways. On the complete fixture, both return the same ten assigned ticket IDs. The two unassigned tickets do not qualify.</a:t>
-            </a:r>
-          </a:p>
-          <a:p xmlns:a="http://schemas.openxmlformats.org/drawingml/2006/main">
-            <a:r>
-              <a:t/>
-            </a:r>
-          </a:p>
-          <a:p xmlns:a="http://schemas.openxmlformats.org/drawingml/2006/main">
-            <a:r>
-              <a:t>The query on the left contains another SELECT inside parentheses. That inner query returns the identifiers of users whose role is agent. IN tests whether a ticket's assignee_id appears in that result. This is a membership question. We can understand it by first reading the smaller inner query, then the outer query that uses its result.</a:t>
-            </a:r>
-          </a:p>
-          <a:p xmlns:a="http://schemas.openxmlformats.org/drawingml/2006/main">
-            <a:r>
-              <a:t/>
-            </a:r>
-          </a:p>
-          <a:p xmlns:a="http://schemas.openxmlformats.org/drawingml/2006/main">
-            <a:r>
-              <a:t>The version on the right begins with WITH agents AS. This is a common table expression, usually shortened to CTE. The name agents refers to the result inside the parentheses for this statement. The final SELECT joins tickets to that named result. It does not create a permanent agents table or change the users table.</a:t>
-            </a:r>
-          </a:p>
-          <a:p xmlns:a="http://schemas.openxmlformats.org/drawingml/2006/main">
-            <a:r>
-              <a:t/>
-            </a:r>
-          </a:p>
-          <a:p xmlns:a="http://schemas.openxmlformats.org/drawingml/2006/main">
-            <a:r>
-              <a:t>A CTE can make a query easier to read by giving an intermediate result a useful name. It does not automatically make the query faster. Some CTEs are folded into the surrounding query, and others may be materialized depending on the query and database behavior.</a:t>
-            </a:r>
-          </a:p>
-          <a:p xmlns:a="http://schemas.openxmlformats.org/drawingml/2006/main">
-            <a:r>
-              <a:t/>
-            </a:r>
-          </a:p>
-          <a:p xmlns:a="http://schemas.openxmlformats.org/drawingml/2006/main">
-            <a:r>
-              <a:t>For the next worked example, the named result will contain resolved tickets. In the lab, it will contain active tickets. Naming that filtered input keeps the status definition separate from the staff summary that uses it.</a:t>
-            </a:r>
-          </a:p>
-          <a:p xmlns:a="http://schemas.openxmlformats.org/drawingml/2006/main">
-            <a:r>
-              <a:t/>
-            </a:r>
-          </a:p>
+              <a:t>Here are two ways to ask the same question: which tickets are assigned to users whose role is agent? On the full fixture, both return the same ten assigned ticket IDs.</a:t>
+            </a:r>
+          </a:p>
+          <a:p xmlns:a="http://schemas.openxmlformats.org/drawingml/2006/main"/>
+          <a:p xmlns:a="http://schemas.openxmlformats.org/drawingml/2006/main">
+            <a:r>
+              <a:t>The left version is a nested query, a SELECT inside parentheses. Read it inside out. The inner query returns the user IDs of agents. Then the outer query uses IN to ask: is this ticket's assignee_id in that list? It is a membership question, and you can run the inner part by itself first.</a:t>
+            </a:r>
+          </a:p>
+          <a:p xmlns:a="http://schemas.openxmlformats.org/drawingml/2006/main"/>
+          <a:p xmlns:a="http://schemas.openxmlformats.org/drawingml/2006/main">
+            <a:r>
+              <a:t>The right version starts with WITH agents AS. That is a common table expression, a CTE. It gives the result in the parentheses a name, agents, and then the final SELECT joins tickets to that named result. Look at the note at the bottom: the name exists for this statement only. It does not create an agents table, and it does not change the users table.</a:t>
+            </a:r>
+          </a:p>
+          <a:p xmlns:a="http://schemas.openxmlformats.org/drawingml/2006/main"/>
+          <a:p xmlns:a="http://schemas.openxmlformats.org/drawingml/2006/main">
+            <a:r>
+              <a:t>Why use a CTE? Readability. You give an intermediate result a meaningful name, and the main query reads almost like a sentence. Do not assume it makes anything faster, though. Depending on the query, the database may fold a CTE into the surrounding query or compute it separately.</a:t>
+            </a:r>
+          </a:p>
+          <a:p xmlns:a="http://schemas.openxmlformats.org/drawingml/2006/main"/>
+          <a:p xmlns:a="http://schemas.openxmlformats.org/drawingml/2006/main">
+            <a:r>
+              <a:t>Here is where this goes next. In the worked example coming up, the named result holds resolved tickets. In your lab, it holds active tickets. Naming that filtered input keeps the status definition separate from the staff report that uses it.</a:t>
+            </a:r>
+          </a:p>
+          <a:p xmlns:a="http://schemas.openxmlformats.org/drawingml/2006/main"/>
           <a:p xmlns:a="http://schemas.openxmlformats.org/drawingml/2006/main">
             <a:r>
               <a:t>[Sources]</a:t>
@@ -1368,54 +1244,40 @@
           <a:lstStyle xmlns:a="http://schemas.openxmlformats.org/drawingml/2006/main"/>
           <a:p xmlns:a="http://schemas.openxmlformats.org/drawingml/2006/main">
             <a:r>
-              <a:t>This worked report counts resolved tickets for every staff member, including anyone with zero. It is a different question from the active-workload lab, but it uses the same structure. The CTE named resolved contains ticket identifiers and assignee identifiers for tickets whose status is resolved.</a:t>
-            </a:r>
-          </a:p>
-          <a:p xmlns:a="http://schemas.openxmlformats.org/drawingml/2006/main">
-            <a:r>
-              <a:t/>
-            </a:r>
-          </a:p>
-          <a:p xmlns:a="http://schemas.openxmlformats.org/drawingml/2006/main">
-            <a:r>
-              <a:t>The outer query starts from users because the report must preserve staff members. It left-joins the resolved input by assignee ID. The WHERE clause keeps users whose role is agent or supervisor. Notice that this filter refers to the preserved left side. The status condition has already filtered the right-side input inside the CTE.</a:t>
-            </a:r>
-          </a:p>
-          <a:p xmlns:a="http://schemas.openxmlformats.org/drawingml/2006/main">
-            <a:r>
-              <a:t/>
-            </a:r>
-          </a:p>
-          <a:p xmlns:a="http://schemas.openxmlformats.org/drawingml/2006/main">
-            <a:r>
-              <a:t>GROUP BY combines matches for each staff identifier and display name. We include the identifier so that two people with the same name would remain distinct staff members. COUNT(r.ticket_id) counts non-NULL ticket identifiers. Priya has resolved tickets 1003 and 1008. Noah has 1005 and 1012. Elena has no matching ticket, so her count is zero.</a:t>
-            </a:r>
-          </a:p>
-          <a:p xmlns:a="http://schemas.openxmlformats.org/drawingml/2006/main">
-            <a:r>
-              <a:t/>
-            </a:r>
-          </a:p>
-          <a:p xmlns:a="http://schemas.openxmlformats.org/drawingml/2006/main">
-            <a:r>
-              <a:t>For Elena, the left join still produces a row carrying her user information, with NULL in the right-side ticket columns. COUNT(*) would count that row and incorrectly report one resolved ticket. COUNT(r.ticket_id) ignores the missing ticket value and reports zero.</a:t>
-            </a:r>
-          </a:p>
-          <a:p xmlns:a="http://schemas.openxmlformats.org/drawingml/2006/main">
-            <a:r>
-              <a:t/>
-            </a:r>
-          </a:p>
-          <a:p xmlns:a="http://schemas.openxmlformats.org/drawingml/2006/main">
-            <a:r>
-              <a:t>The lab changes the filtered input from resolved tickets to active tickets. Keep the report's intended unit, one row per staff member, and check one person's count with a direct ticket list. That adaptation tests whether the relationship and counting mechanism make sense.</a:t>
-            </a:r>
-          </a:p>
-          <a:p xmlns:a="http://schemas.openxmlformats.org/drawingml/2006/main">
-            <a:r>
-              <a:t/>
-            </a:r>
-          </a:p>
+              <a:t>This is the worked example behind Lab 2: a staff report that includes zero. The question is how many resolved tickets each staff member has, including anyone with none.</a:t>
+            </a:r>
+          </a:p>
+          <a:p xmlns:a="http://schemas.openxmlformats.org/drawingml/2006/main"/>
+          <a:p xmlns:a="http://schemas.openxmlformats.org/drawingml/2006/main">
+            <a:r>
+              <a:t>The CTE named resolved holds the ticket ID and assignee ID of every resolved ticket. The status filter lives here, inside the CTE, so it only shapes the right-hand side.</a:t>
+            </a:r>
+          </a:p>
+          <a:p xmlns:a="http://schemas.openxmlformats.org/drawingml/2006/main"/>
+          <a:p xmlns:a="http://schemas.openxmlformats.org/drawingml/2006/main">
+            <a:r>
+              <a:t>The main query starts FROM users, because the report must keep every staff member, and it left-joins resolved on assignee ID. The WHERE keeps users whose role is agent or supervisor. Notice that it filters the preserved left side, the users, so it cannot knock out an unmatched row.</a:t>
+            </a:r>
+          </a:p>
+          <a:p xmlns:a="http://schemas.openxmlformats.org/drawingml/2006/main"/>
+          <a:p xmlns:a="http://schemas.openxmlformats.org/drawingml/2006/main">
+            <a:r>
+              <a:t>GROUP BY user_id and display_name gives one row per staff member. We keep the ID so two people with the same name would still be counted separately.</a:t>
+            </a:r>
+          </a:p>
+          <a:p xmlns:a="http://schemas.openxmlformats.org/drawingml/2006/main"/>
+          <a:p xmlns:a="http://schemas.openxmlformats.org/drawingml/2006/main">
+            <a:r>
+              <a:t>Look at the result. Agent 201 has 2, tickets 1003 and 1008. Agent 202 has 2, tickets 1005 and 1012. Agent 203 has 0. One labeling trap: despite that name, user 203 is the supervisor, which is why the WHERE includes supervisor.</a:t>
+            </a:r>
+          </a:p>
+          <a:p xmlns:a="http://schemas.openxmlformats.org/drawingml/2006/main"/>
+          <a:p xmlns:a="http://schemas.openxmlformats.org/drawingml/2006/main">
+            <a:r>
+              <a:t>Now the key part, in the box on the right. Agent 203 has no match, but the left join still produces one row for that user, with NULL in the ticket columns. COUNT of r.ticket_id ignores the NULL and gives 0. COUNT star counts the row and gives 1. One small change in what you count, and the report says someone resolved a ticket they never touched.</a:t>
+            </a:r>
+          </a:p>
+          <a:p xmlns:a="http://schemas.openxmlformats.org/drawingml/2006/main"/>
           <a:p xmlns:a="http://schemas.openxmlformats.org/drawingml/2006/main">
             <a:r>
               <a:t>[Sources]</a:t>
@@ -1498,54 +1360,34 @@
           <a:lstStyle xmlns:a="http://schemas.openxmlformats.org/drawingml/2006/main"/>
           <a:p xmlns:a="http://schemas.openxmlformats.org/drawingml/2006/main">
             <a:r>
-              <a:t>Set operators combine compatible query results. Compatible means the results have the same number of columns and corresponding columns have compatible types. The operator compares complete result rows, not the tables' original primary keys unless those keys are part of the selected output.</a:t>
-            </a:r>
-          </a:p>
-          <a:p xmlns:a="http://schemas.openxmlformats.org/drawingml/2006/main">
-            <a:r>
-              <a:t/>
-            </a:r>
-          </a:p>
-          <a:p xmlns:a="http://schemas.openxmlformats.org/drawingml/2006/main">
-            <a:r>
-              <a:t>The small example uses A containing one and two, and B containing two and three. UNION includes values from either result and removes repeated result rows, giving one, two, and three. UNION ALL retains both copies of two. INTERSECT keeps the shared value two. EXCEPT keeps the value in A that does not occur in B, which is one.</a:t>
-            </a:r>
-          </a:p>
-          <a:p xmlns:a="http://schemas.openxmlformats.org/drawingml/2006/main">
-            <a:r>
-              <a:t/>
-            </a:r>
-          </a:p>
-          <a:p xmlns:a="http://schemas.openxmlformats.org/drawingml/2006/main">
-            <a:r>
-              <a:t>We have displayed the values in sorted order to make the comparison easy. Neither UNION nor UNION ALL guarantees that output order. In particular, UNION ALL does not promise that every A row arrives before every B row. To require an order, the combined SQL query needs ORDER BY.</a:t>
-            </a:r>
-          </a:p>
-          <a:p xmlns:a="http://schemas.openxmlformats.org/drawingml/2006/main">
-            <a:r>
-              <a:t/>
-            </a:r>
-          </a:p>
-          <a:p xmlns:a="http://schemas.openxmlformats.org/drawingml/2006/main">
-            <a:r>
-              <a:t>Keeping duplicates can be the correct choice. If two independent event sources each contain a real event with the same selected values, removing one may lose useful information. Conversely, a list of distinct people may need duplicate removal. The operator should express that decision.</a:t>
-            </a:r>
-          </a:p>
-          <a:p xmlns:a="http://schemas.openxmlformats.org/drawingml/2006/main">
-            <a:r>
-              <a:t/>
-            </a:r>
-          </a:p>
-          <a:p xmlns:a="http://schemas.openxmlformats.org/drawingml/2006/main">
-            <a:r>
-              <a:t>The lab extension uses EXCEPT to compare requester IDs and assignee IDs. It is optional. The core assignment concentrates on the join, staff count, and controlled update rather than adding another required set of queries.</a:t>
-            </a:r>
-          </a:p>
-          <a:p xmlns:a="http://schemas.openxmlformats.org/drawingml/2006/main">
-            <a:r>
-              <a:t/>
-            </a:r>
-          </a:p>
+              <a:t>Set operators combine the results of two queries. The rule is that the results must be compatible: same number of columns, and matching columns with compatible types. They compare whole result rows, not primary keys, unless the key is one of the columns you selected.</a:t>
+            </a:r>
+          </a:p>
+          <a:p xmlns:a="http://schemas.openxmlformats.org/drawingml/2006/main"/>
+          <a:p xmlns:a="http://schemas.openxmlformats.org/drawingml/2006/main">
+            <a:r>
+              <a:t>Look at the table. A contains 1 and 2. B contains 2 and 3. UNION gives rows from either side and removes repeats: 1, 2, 3. UNION ALL keeps everything, so 2 shows up twice: 1, 2, 2, 3. INTERSECT keeps what is in both, just 2. EXCEPT keeps what is in A but not in B, just 1.</a:t>
+            </a:r>
+          </a:p>
+          <a:p xmlns:a="http://schemas.openxmlformats.org/drawingml/2006/main"/>
+          <a:p xmlns:a="http://schemas.openxmlformats.org/drawingml/2006/main">
+            <a:r>
+              <a:t>Read the caveat at the bottom. We listed those values in sorted order so you can compare them easily. SQL does not promise that order. UNION ALL does not even promise that all of A arrives before all of B. If you need an order, put ORDER BY on the combined query.</a:t>
+            </a:r>
+          </a:p>
+          <a:p xmlns:a="http://schemas.openxmlformats.org/drawingml/2006/main"/>
+          <a:p xmlns:a="http://schemas.openxmlformats.org/drawingml/2006/main">
+            <a:r>
+              <a:t>So how do you choose between UNION and UNION ALL? That is a decision about meaning. If two event sources each record a real event with the same selected values, removing one throws away information, so UNION ALL is right. If you want a list of distinct people, removing repeats is right. Pick the operator that says what you mean.</a:t>
+            </a:r>
+          </a:p>
+          <a:p xmlns:a="http://schemas.openxmlformats.org/drawingml/2006/main"/>
+          <a:p xmlns:a="http://schemas.openxmlformats.org/drawingml/2006/main">
+            <a:r>
+              <a:t>The lab extension uses EXCEPT to find requester IDs that never appear as assignees. It is optional. The required work stays on the join, the staff count, and the controlled update.</a:t>
+            </a:r>
+          </a:p>
+          <a:p xmlns:a="http://schemas.openxmlformats.org/drawingml/2006/main"/>
           <a:p xmlns:a="http://schemas.openxmlformats.org/drawingml/2006/main">
             <a:r>
               <a:t>[Sources]</a:t>
@@ -1628,54 +1470,40 @@
           <a:lstStyle xmlns:a="http://schemas.openxmlformats.org/drawingml/2006/main"/>
           <a:p xmlns:a="http://schemas.openxmlformats.org/drawingml/2006/main">
             <a:r>
-              <a:t>This is a complete rehearsal of a change to ticket 1002. The first SELECT previews its current priority, which is medium in the starting fixture. We then begin a transaction. A transaction gives related database actions a boundary within which they can succeed together or be rolled back before commitment.</a:t>
-            </a:r>
-          </a:p>
-          <a:p xmlns:a="http://schemas.openxmlformats.org/drawingml/2006/main">
-            <a:r>
-              <a:t/>
-            </a:r>
-          </a:p>
-          <a:p xmlns:a="http://schemas.openxmlformats.org/drawingml/2006/main">
-            <a:r>
-              <a:t>UPDATE changes the priority to high, but only where ticket_id equals 1002. That WHERE clause is essential. Without it, the command could change many tickets. RETURNING shows the identifier and new priority of the affected row. The SELECT inside the transaction confirms that the transaction can see its own change.</a:t>
-            </a:r>
-          </a:p>
-          <a:p xmlns:a="http://schemas.openxmlformats.org/drawingml/2006/main">
-            <a:r>
-              <a:t/>
-            </a:r>
-          </a:p>
-          <a:p xmlns:a="http://schemas.openxmlformats.org/drawingml/2006/main">
-            <a:r>
-              <a:t>ROLLBACK discards this uncommitted update. The final SELECT must show medium again. That final query is important: it checks the restored value instead of assuming that the rollback worked as intended.</a:t>
-            </a:r>
-          </a:p>
-          <a:p xmlns:a="http://schemas.openxmlformats.org/drawingml/2006/main">
-            <a:r>
-              <a:t/>
-            </a:r>
-          </a:p>
-          <a:p xmlns:a="http://schemas.openxmlformats.org/drawingml/2006/main">
-            <a:r>
-              <a:t>Run this whole block together in one SQL Editor execution. Running fragments in separate pooled sessions can break the intended transaction boundary. The notebook uses one connection and explains which commands go through execute and which return a result table.</a:t>
-            </a:r>
-          </a:p>
-          <a:p xmlns:a="http://schemas.openxmlformats.org/drawingml/2006/main">
-            <a:r>
-              <a:t/>
-            </a:r>
-          </a:p>
-          <a:p xmlns:a="http://schemas.openxmlformats.org/drawingml/2006/main">
-            <a:r>
-              <a:t>This demonstration uses ticket 1002. The lab applies the same pattern to ticket 1006. Both start at medium, but the different identifier makes you inspect the target rather than copy a statement without reading it. A transaction does not make a bad predicate harmless after commitment, and this simple update does not establish a general recovery strategy.</a:t>
-            </a:r>
-          </a:p>
-          <a:p xmlns:a="http://schemas.openxmlformats.org/drawingml/2006/main">
-            <a:r>
-              <a:t/>
-            </a:r>
-          </a:p>
+              <a:t>Now the most important habit of the week: changing data carefully. This is a full rehearsal of a priority change on ticket 1002.</a:t>
+            </a:r>
+          </a:p>
+          <a:p xmlns:a="http://schemas.openxmlformats.org/drawingml/2006/main"/>
+          <a:p xmlns:a="http://schemas.openxmlformats.org/drawingml/2006/main">
+            <a:r>
+              <a:t>First a SELECT that previews the target. Ticket 1002 is medium in the starting data. You look before you change, so a wrong ID gets caught early.</a:t>
+            </a:r>
+          </a:p>
+          <a:p xmlns:a="http://schemas.openxmlformats.org/drawingml/2006/main"/>
+          <a:p xmlns:a="http://schemas.openxmlformats.org/drawingml/2006/main">
+            <a:r>
+              <a:t>BEGIN starts a transaction, a boundary around related actions so they succeed together or get undone together. UPDATE sets priority to high, WHERE ticket_id = 1002. That WHERE is the whole safety of the statement. Leave it off and every ticket becomes high. RETURNING shows the row the update actually changed: 1002, high. The next SELECT shows high again, because a transaction can see its own changes.</a:t>
+            </a:r>
+          </a:p>
+          <a:p xmlns:a="http://schemas.openxmlformats.org/drawingml/2006/main"/>
+          <a:p xmlns:a="http://schemas.openxmlformats.org/drawingml/2006/main">
+            <a:r>
+              <a:t>Then ROLLBACK throws the change away, and the final SELECT shows medium again. Do not skip that last query. It is how you prove the rollback worked instead of assuming it did.</a:t>
+            </a:r>
+          </a:p>
+          <a:p xmlns:a="http://schemas.openxmlformats.org/drawingml/2006/main"/>
+          <a:p xmlns:a="http://schemas.openxmlformats.org/drawingml/2006/main">
+            <a:r>
+              <a:t>A practical warning. Run the whole block together, on one connection. If the pieces land on different connections, the transaction boundary breaks. And the Supabase SQL Editor shows only the last statement's result, which here is the final medium, so you would never see the high rows. That is why we watch this in the notebook: it keeps one connection and shows every result.</a:t>
+            </a:r>
+          </a:p>
+          <a:p xmlns:a="http://schemas.openxmlformats.org/drawingml/2006/main"/>
+          <a:p xmlns:a="http://schemas.openxmlformats.org/drawingml/2006/main">
+            <a:r>
+              <a:t>The lab uses ticket 1006, which also starts at medium. A different ID on purpose, so you read the target instead of copying. And remember, a transaction protects you before commit, not after.</a:t>
+            </a:r>
+          </a:p>
+          <a:p xmlns:a="http://schemas.openxmlformats.org/drawingml/2006/main"/>
           <a:p xmlns:a="http://schemas.openxmlformats.org/drawingml/2006/main">
             <a:r>
               <a:t>[Sources]</a:t>
@@ -1763,54 +1591,40 @@
           <a:lstStyle xmlns:a="http://schemas.openxmlformats.org/drawingml/2006/main"/>
           <a:p xmlns:a="http://schemas.openxmlformats.org/drawingml/2006/main">
             <a:r>
-              <a:t>A useful check approaches the result from a different direction. Suppose a staff summary says that one person has two resolved tickets. We can list that person's resolved ticket IDs directly from the tickets table and count them. That list should explain the aggregate instead of merely repeating it.</a:t>
-            </a:r>
-          </a:p>
-          <a:p xmlns:a="http://schemas.openxmlformats.org/drawingml/2006/main">
-            <a:r>
-              <a:t/>
-            </a:r>
-          </a:p>
-          <a:p xmlns:a="http://schemas.openxmlformats.org/drawingml/2006/main">
-            <a:r>
-              <a:t>Boundary cases are particularly informative. Elena is a staff member with no assigned tickets. If the report omits her, an inner join or a filter may be removing zero-workload staff. If the report says she has one ticket, COUNT(*) may be counting the placeholder row produced by a left join. Those two mistakes require different repairs.</a:t>
-            </a:r>
-          </a:p>
-          <a:p xmlns:a="http://schemas.openxmlformats.org/drawingml/2006/main">
-            <a:r>
-              <a:t/>
-            </a:r>
-          </a:p>
-          <a:p xmlns:a="http://schemas.openxmlformats.org/drawingml/2006/main">
-            <a:r>
-              <a:t>For an all-ticket dashboard, the important boundary cases are 1004 and 1009. Both lack assignees, but both are real requests. A report that promises every ticket must retain them. Comparing only total counts can hide a mistake if one missing row is accidentally balanced by another repeated row. Checking identifiers helps expose that situation.</a:t>
-            </a:r>
-          </a:p>
-          <a:p xmlns:a="http://schemas.openxmlformats.org/drawingml/2006/main">
-            <a:r>
-              <a:t/>
-            </a:r>
-          </a:p>
-          <a:p xmlns:a="http://schemas.openxmlformats.org/drawingml/2006/main">
-            <a:r>
-              <a:t>These checks establish specific properties on this fixture. They do not show that the query is fast on a million tickets, safe under concurrent changes, or available during a server failure. Later weeks develop those additional questions.</a:t>
-            </a:r>
-          </a:p>
-          <a:p xmlns:a="http://schemas.openxmlformats.org/drawingml/2006/main">
-            <a:r>
-              <a:t/>
-            </a:r>
-          </a:p>
-          <a:p xmlns:a="http://schemas.openxmlformats.org/drawingml/2006/main">
-            <a:r>
-              <a:t>In a code review, a short explanation of the question and a concrete boundary-case check are often more useful than a screenshot containing an unexplained result table. The lab keeps that explanation with the SQL it describes.</a:t>
-            </a:r>
-          </a:p>
-          <a:p xmlns:a="http://schemas.openxmlformats.org/drawingml/2006/main">
-            <a:r>
-              <a:t/>
-            </a:r>
-          </a:p>
+              <a:t>How do you know a report is right? Not by running the same query twice. A useful check comes at the answer from a different direction.</a:t>
+            </a:r>
+          </a:p>
+          <a:p xmlns:a="http://schemas.openxmlformats.org/drawingml/2006/main"/>
+          <a:p xmlns:a="http://schemas.openxmlformats.org/drawingml/2006/main">
+            <a:r>
+              <a:t>One: list the ticket IDs behind a single staff count. If the summary says someone has two resolved tickets, pull that person's resolved tickets straight from the tickets table. The list should explain the number, not just repeat it.</a:t>
+            </a:r>
+          </a:p>
+          <a:p xmlns:a="http://schemas.openxmlformats.org/drawingml/2006/main"/>
+          <a:p xmlns:a="http://schemas.openxmlformats.org/drawingml/2006/main">
+            <a:r>
+              <a:t>Two: keep a staff member with zero matches. Agent 203 is our boundary case, a staff member with no assigned tickets. If the report leaves that user out, an inner join or a filter is removing zero-workload staff. If it says one, COUNT star is counting the placeholder row from the left join. Two different symptoms, two different repairs.</a:t>
+            </a:r>
+          </a:p>
+          <a:p xmlns:a="http://schemas.openxmlformats.org/drawingml/2006/main"/>
+          <a:p xmlns:a="http://schemas.openxmlformats.org/drawingml/2006/main">
+            <a:r>
+              <a:t>Three: check that tickets 1004 and 1009 still appear on an all-ticket dashboard. Both are real requests with no assignee. And check the IDs, not just the total. If one ticket goes missing and a bad join repeats another, the count can still look right. Only the identifiers reveal it.</a:t>
+            </a:r>
+          </a:p>
+          <a:p xmlns:a="http://schemas.openxmlformats.org/drawingml/2006/main"/>
+          <a:p xmlns:a="http://schemas.openxmlformats.org/drawingml/2006/main">
+            <a:r>
+              <a:t>Four: a correct answer on this small fixture says nothing about speed on a million tickets, safety when people change data at the same time, or surviving a server failure. Those are later weeks.</a:t>
+            </a:r>
+          </a:p>
+          <a:p xmlns:a="http://schemas.openxmlformats.org/drawingml/2006/main"/>
+          <a:p xmlns:a="http://schemas.openxmlformats.org/drawingml/2006/main">
+            <a:r>
+              <a:t>In a code review, a short statement of the question and one concrete boundary check beat a screenshot of an unexplained result table. That is why your labs keep the explanation beside the SQL.</a:t>
+            </a:r>
+          </a:p>
+          <a:p xmlns:a="http://schemas.openxmlformats.org/drawingml/2006/main"/>
           <a:p xmlns:a="http://schemas.openxmlformats.org/drawingml/2006/main">
             <a:r>
               <a:t>[Sources]</a:t>
@@ -1893,44 +1707,28 @@
           <a:lstStyle xmlns:a="http://schemas.openxmlformats.org/drawingml/2006/main"/>
           <a:p xmlns:a="http://schemas.openxmlformats.org/drawingml/2006/main">
             <a:r>
-              <a:t>Suppose a staff member asks for high-priority requests that are still active. Before choosing SQL clauses, we need to decide exactly what those words mean. In this dataset, priority is a stored value such as low, medium, high, or urgent. High and urgent are different values. A request can have high priority and already be resolved. A condition on priority alone would include that finished work.</a:t>
-            </a:r>
-          </a:p>
-          <a:p xmlns:a="http://schemas.openxmlformats.org/drawingml/2006/main">
-            <a:r>
-              <a:t/>
-            </a:r>
-          </a:p>
-          <a:p xmlns:a="http://schemas.openxmlformats.org/drawingml/2006/main">
-            <a:r>
-              <a:t>For this week, active means that status is new, open, or in_progress. We need both conditions: priority must be high, and status must belong to the active set. The output should have one row for each matching request. Including the ticket identifier helps us recognize which request each row describes.</a:t>
-            </a:r>
-          </a:p>
-          <a:p xmlns:a="http://schemas.openxmlformats.org/drawingml/2006/main">
-            <a:r>
-              <a:t/>
-            </a:r>
-          </a:p>
-          <a:p xmlns:a="http://schemas.openxmlformats.org/drawingml/2006/main">
-            <a:r>
-              <a:t>This definition also gives us a way to check the answer. We can read the small source table and identify the matching ticket IDs independently. If the query returns a resolved ticket, the active-status condition is missing or incorrect. If a request appears twice, we need to examine whether a join has changed what each output row represents.</a:t>
-            </a:r>
-          </a:p>
-          <a:p xmlns:a="http://schemas.openxmlformats.org/drawingml/2006/main">
-            <a:r>
-              <a:t/>
-            </a:r>
-          </a:p>
-          <a:p xmlns:a="http://schemas.openxmlformats.org/drawingml/2006/main">
-            <a:r>
-              <a:t>SQL syntax errors usually produce an error message. A more dangerous mistake is a query that executes successfully but answers a different question. A database cannot infer that our definition of active work is wrong. The reporting question, the query, and the result all need to agree.</a:t>
-            </a:r>
-          </a:p>
-          <a:p xmlns:a="http://schemas.openxmlformats.org/drawingml/2006/main">
-            <a:r>
-              <a:t/>
-            </a:r>
-          </a:p>
+              <a:t>Let's start the way real work starts: with a question in plain English. A staff member asks, which high-priority requests are still active? Before I type a single SQL keyword, I need to know exactly what those words mean, because the database cannot guess.</a:t>
+            </a:r>
+          </a:p>
+          <a:p xmlns:a="http://schemas.openxmlformats.org/drawingml/2006/main"/>
+          <a:p xmlns:a="http://schemas.openxmlformats.org/drawingml/2006/main">
+            <a:r>
+              <a:t>Take high priority first. In this dataset priority is a stored value: low, medium, high, or urgent. High and urgent are different values. If the staff member really meant high or urgent, that is a different query, so we ask. Now take active. A request can be high priority and already resolved. If I filter on priority alone, finished work sneaks into the list. So for this week, active means status is new, open, or in_progress.</a:t>
+            </a:r>
+          </a:p>
+          <a:p xmlns:a="http://schemas.openxmlformats.org/drawingml/2006/main"/>
+          <a:p xmlns:a="http://schemas.openxmlformats.org/drawingml/2006/main">
+            <a:r>
+              <a:t>Look at the three boxes. The question says one result row should be one request that still needs work. The condition says priority is high and status is in the active set. Both conditions. And the check says read the matching ticket IDs in the source data yourself, separately from the query.</a:t>
+            </a:r>
+          </a:p>
+          <a:p xmlns:a="http://schemas.openxmlformats.org/drawingml/2006/main"/>
+          <a:p xmlns:a="http://schemas.openxmlformats.org/drawingml/2006/main">
+            <a:r>
+              <a:t>Here is why the check matters. A syntax error gives you a message, and you fix it. The dangerous mistake is a query that runs perfectly and answers a different question. If a resolved ticket shows up, the status condition is wrong. If a request appears twice, something has changed what a row means. The question, the query, and the result all have to agree.</a:t>
+            </a:r>
+          </a:p>
+          <a:p xmlns:a="http://schemas.openxmlformats.org/drawingml/2006/main"/>
           <a:p xmlns:a="http://schemas.openxmlformats.org/drawingml/2006/main">
             <a:r>
               <a:t>[Sources]</a:t>
@@ -2013,54 +1811,34 @@
           <a:lstStyle xmlns:a="http://schemas.openxmlformats.org/drawingml/2006/main"/>
           <a:p xmlns:a="http://schemas.openxmlformats.org/drawingml/2006/main">
             <a:r>
-              <a:t>The second lab repairs a staff dashboard. It uses the same complete dataset, but the reporting problem now includes relationships, summaries, and a controlled change. Work individually and keep the work in one SQL file.</a:t>
-            </a:r>
-          </a:p>
-          <a:p xmlns:a="http://schemas.openxmlformats.org/drawingml/2006/main">
-            <a:r>
-              <a:t/>
-            </a:r>
-          </a:p>
-          <a:p xmlns:a="http://schemas.openxmlformats.org/drawingml/2006/main">
-            <a:r>
-              <a:t>First, run the supplied all-ticket query. It uses an inner join to the assignee and loses two requests. Repair the join so that all twelve tickets remain. A missing assignee name should remain NULL. There is no need to invent a staff member or modify the source records.</a:t>
-            </a:r>
-          </a:p>
-          <a:p xmlns:a="http://schemas.openxmlformats.org/drawingml/2006/main">
-            <a:r>
-              <a:t/>
-            </a:r>
-          </a:p>
-          <a:p xmlns:a="http://schemas.openxmlformats.org/drawingml/2006/main">
-            <a:r>
-              <a:t>Second, use the supplied active-ticket CTE to count active work for each staff member. Staff means agent or supervisor for this report. Preserve a staff member with zero matching tickets. The resolved-ticket example from class shows how a filtered input, a left join, and COUNT of the ticket identifier work together. Adapt the definition to active work, then check Priya's count with a direct list of her active ticket IDs.</a:t>
-            </a:r>
-          </a:p>
-          <a:p xmlns:a="http://schemas.openxmlformats.org/drawingml/2006/main">
-            <a:r>
-              <a:t/>
-            </a:r>
-          </a:p>
-          <a:p xmlns:a="http://schemas.openxmlformats.org/drawingml/2006/main">
-            <a:r>
-              <a:t>Finally, test a change to ticket 1006 from medium to high priority. Preview the row, observe the changed value inside the transaction, roll back, and verify medium afterward.</a:t>
-            </a:r>
-          </a:p>
-          <a:p xmlns:a="http://schemas.openxmlformats.org/drawingml/2006/main">
-            <a:r>
-              <a:t/>
-            </a:r>
-          </a:p>
-          <a:p xmlns:a="http://schemas.openxmlformats.org/drawingml/2006/main">
-            <a:r>
-              <a:t>Submit week_02_relational_sql_studio.sql in Brightspace with concise comments next to the relevant SQL. No separate reflection, database password, connection URL, or additional document belongs in the submission. The required work is the repaired report, the checked staff summary, and the rollback experiment.</a:t>
-            </a:r>
-          </a:p>
-          <a:p xmlns:a="http://schemas.openxmlformats.org/drawingml/2006/main">
-            <a:r>
-              <a:t/>
-            </a:r>
-          </a:p>
+              <a:t>Here is Lab 2, Repair the Staff Dashboard. Same complete dataset, individual work, one SQL file.</a:t>
+            </a:r>
+          </a:p>
+          <a:p xmlns:a="http://schemas.openxmlformats.org/drawingml/2006/main"/>
+          <a:p xmlns:a="http://schemas.openxmlformats.org/drawingml/2006/main">
+            <a:r>
+              <a:t>Part one. Run the supplied all-ticket query. It uses an inner join to the assignee, and it loses two requests. Find which ticket IDs are missing, then repair the join so all twelve tickets remain. An unassigned ticket should show a NULL assignee name. Do not invent a staff member to fill the blank, and do not edit the source records.</a:t>
+            </a:r>
+          </a:p>
+          <a:p xmlns:a="http://schemas.openxmlformats.org/drawingml/2006/main"/>
+          <a:p xmlns:a="http://schemas.openxmlformats.org/drawingml/2006/main">
+            <a:r>
+              <a:t>Part two. Use the supplied active-ticket CTE to count active work for each staff member. Staff here means role agent or supervisor, and a staff member with zero matching tickets must still appear, with zero. This is the worked example from slide 16, with active work in place of resolved. Then check Agent 201's count with a direct list of that user's active ticket IDs, and explain why the two unassigned active tickets are not anybody's workload.</a:t>
+            </a:r>
+          </a:p>
+          <a:p xmlns:a="http://schemas.openxmlformats.org/drawingml/2006/main"/>
+          <a:p xmlns:a="http://schemas.openxmlformats.org/drawingml/2006/main">
+            <a:r>
+              <a:t>Part three. Test changing ticket 1006 from medium to high. Preview the row, show the change inside the transaction, roll back, and verify it is medium afterward. Do this part in the Colab notebook so you can actually see the high value before the rollback, because the Supabase editor shows only the final result.</a:t>
+            </a:r>
+          </a:p>
+          <a:p xmlns:a="http://schemas.openxmlformats.org/drawingml/2006/main"/>
+          <a:p xmlns:a="http://schemas.openxmlformats.org/drawingml/2006/main">
+            <a:r>
+              <a:t>Submit week_02_relational_sql_studio.sql in Brightspace, with short comments next to the SQL they explain. No separate reflection, and never a database password or connection URL in the file. The extensions at the end of the lab are ungraded.</a:t>
+            </a:r>
+          </a:p>
+          <a:p xmlns:a="http://schemas.openxmlformats.org/drawingml/2006/main"/>
           <a:p xmlns:a="http://schemas.openxmlformats.org/drawingml/2006/main">
             <a:r>
               <a:t>[Sources]</a:t>
@@ -2143,54 +1921,28 @@
           <a:lstStyle xmlns:a="http://schemas.openxmlformats.org/drawingml/2006/main"/>
           <a:p xmlns:a="http://schemas.openxmlformats.org/drawingml/2006/main">
             <a:r>
-              <a:t>We have used SQL to describe results at several levels of detail. A filter chooses which rows qualify. The output list chooses which values describe them. A join forms related pairs, and its type determines what happens to unmatched rows. Grouping changes the result from individual records to summaries.</a:t>
-            </a:r>
-          </a:p>
-          <a:p xmlns:a="http://schemas.openxmlformats.org/drawingml/2006/main">
-            <a:r>
-              <a:t/>
-            </a:r>
-          </a:p>
-          <a:p xmlns:a="http://schemas.openxmlformats.org/drawingml/2006/main">
-            <a:r>
-              <a:t>The service-desk case gives each of those ideas a concrete consequence. Unassigned tickets disappear from an inner-join dashboard. One ticket can repeat when it has several events. A staff member with no matching tickets needs a left join to remain in a staff report, and COUNT of the ticket identifier to receive zero rather than one.</a:t>
-            </a:r>
-          </a:p>
-          <a:p xmlns:a="http://schemas.openxmlformats.org/drawingml/2006/main">
-            <a:r>
-              <a:t/>
-            </a:r>
-          </a:p>
-          <a:p xmlns:a="http://schemas.openxmlformats.org/drawingml/2006/main">
-            <a:r>
-              <a:t>We also separated a tentative data change from a committed change. The transaction experiment previews a specific target, changes it, inspects the new value, rolls it back, and checks the original value again. The SQL file records the operation and its explanation together.</a:t>
-            </a:r>
-          </a:p>
-          <a:p xmlns:a="http://schemas.openxmlformats.org/drawingml/2006/main">
-            <a:r>
-              <a:t/>
-            </a:r>
-          </a:p>
-          <a:p xmlns:a="http://schemas.openxmlformats.org/drawingml/2006/main">
-            <a:r>
-              <a:t>These are foundation skills for the rest of the course. Next week we will inspect and improve schemas. A schema tells us which values and relationships the database permits. Understanding the query result helps us decide which rules matter and how to test them.</a:t>
-            </a:r>
-          </a:p>
-          <a:p xmlns:a="http://schemas.openxmlformats.org/drawingml/2006/main">
-            <a:r>
-              <a:t/>
-            </a:r>
-          </a:p>
-          <a:p xmlns:a="http://schemas.openxmlformats.org/drawingml/2006/main">
-            <a:r>
-              <a:t>Chapter 2 remains available as a reference. The weekly guide names the reading for each meeting, and later labs will reuse these SQL operations in new situations. We will continue practicing them as we add security, performance, and recovery questions.</a:t>
-            </a:r>
-          </a:p>
-          <a:p xmlns:a="http://schemas.openxmlformats.org/drawingml/2006/main">
-            <a:r>
-              <a:t/>
-            </a:r>
-          </a:p>
+              <a:t>Let's pull the week together. Read the first line on the slide: filters choose rows, joins form pairs, and grouping changes what one result row represents. Every query we wrote this week was some combination of those three, and the question we kept asking was the same: what does one row mean?</a:t>
+            </a:r>
+          </a:p>
+          <a:p xmlns:a="http://schemas.openxmlformats.org/drawingml/2006/main"/>
+          <a:p xmlns:a="http://schemas.openxmlformats.org/drawingml/2006/main">
+            <a:r>
+              <a:t>The service desk made each idea concrete. A missing assignee must not remove a ticket from an all-ticket report. That is the left join keeping 1004 and 1009. COUNT of the ticket ID gives zero when a left join finds no match. That is Agent 203 getting zero instead of one. And a ticket can legitimately repeat when it has several events, which is fine for a history and wrong for a count.</a:t>
+            </a:r>
+          </a:p>
+          <a:p xmlns:a="http://schemas.openxmlformats.org/drawingml/2006/main"/>
+          <a:p xmlns:a="http://schemas.openxmlformats.org/drawingml/2006/main">
+            <a:r>
+              <a:t>The last line is the habit I most want you to keep: a targeted change can be inspected before ROLLBACK discards it. Preview the target, change it inside a transaction, look at the new value, roll back, and check the original again. Your SQL file records the operation and the reasoning together.</a:t>
+            </a:r>
+          </a:p>
+          <a:p xmlns:a="http://schemas.openxmlformats.org/drawingml/2006/main"/>
+          <a:p xmlns:a="http://schemas.openxmlformats.org/drawingml/2006/main">
+            <a:r>
+              <a:t>These are foundation skills for the rest of the course. Next week we use these same queries to build views, look at generated identifiers, and rehearse a schema change safely. After that we keep adding security, performance, and recovery questions on top of them. Chapter 2 stays useful as a reference, so if joins or transactions still feel shaky, revisit this week's worked examples before Week 3.</a:t>
+            </a:r>
+          </a:p>
+          <a:p xmlns:a="http://schemas.openxmlformats.org/drawingml/2006/main"/>
           <a:p xmlns:a="http://schemas.openxmlformats.org/drawingml/2006/main">
             <a:r>
               <a:t>[Sources]</a:t>
@@ -2343,44 +2095,34 @@
           <a:lstStyle xmlns:a="http://schemas.openxmlformats.org/drawingml/2006/main"/>
           <a:p xmlns:a="http://schemas.openxmlformats.org/drawingml/2006/main">
             <a:r>
-              <a:t>Result grain means what one output row represents. The word grain refers to the level of detail. A ticket-level result describes individual requests. An event-level result describes individual events. A status-level result describes groups of requests. These are different answers even when they come from the same tables.</a:t>
-            </a:r>
-          </a:p>
-          <a:p xmlns:a="http://schemas.openxmlformats.org/drawingml/2006/main">
-            <a:r>
-              <a:t/>
-            </a:r>
-          </a:p>
-          <a:p xmlns:a="http://schemas.openxmlformats.org/drawingml/2006/main">
-            <a:r>
-              <a:t>Start with the tickets table. A row containing ticket 1003 describes one water-pressure request. If we choose its identifier and subject, it is still one row for that request. Now connect the request to its events. Ticket 1003 has three event records. The join can return three rows, each pairing the ticket with a different event. The repeated ticket ID does not mean that three separate requests were submitted.</a:t>
-            </a:r>
-          </a:p>
-          <a:p xmlns:a="http://schemas.openxmlformats.org/drawingml/2006/main">
-            <a:r>
-              <a:t/>
-            </a:r>
-          </a:p>
-          <a:p xmlns:a="http://schemas.openxmlformats.org/drawingml/2006/main">
-            <a:r>
-              <a:t>Grouping changes the level of detail in another way. If we group all tickets by status, the result has one row for open work, one for resolved work, and so on. The number beside resolved summarizes several requests. An individual subject no longer identifies the whole group.</a:t>
-            </a:r>
-          </a:p>
-          <a:p xmlns:a="http://schemas.openxmlformats.org/drawingml/2006/main">
-            <a:r>
-              <a:t/>
-            </a:r>
-          </a:p>
-          <a:p xmlns:a="http://schemas.openxmlformats.org/drawingml/2006/main">
-            <a:r>
-              <a:t>This distinction matters whenever someone asks for a count. Counting ticket-event pairs and labeling that number as tickets creates an incorrect report. Looking at identifiers makes the difference visible. We will repeatedly ask what one row represents, because that sentence helps us choose a join, an aggregate, and a useful check.</a:t>
-            </a:r>
-          </a:p>
-          <a:p xmlns:a="http://schemas.openxmlformats.org/drawingml/2006/main">
-            <a:r>
-              <a:t/>
-            </a:r>
-          </a:p>
+              <a:t>That last idea has a name, and it is the most useful word this week: grain. Result grain means what one output row represents. Look at the three columns on the slide.</a:t>
+            </a:r>
+          </a:p>
+          <a:p xmlns:a="http://schemas.openxmlformats.org/drawingml/2006/main"/>
+          <a:p xmlns:a="http://schemas.openxmlformats.org/drawingml/2006/main">
+            <a:r>
+              <a:t>On the left, one row per ticket. A row containing ticket 1003 describes one request, the low water pressure one. Keeping ticket_id in the output is how you tell which request each row is.</a:t>
+            </a:r>
+          </a:p>
+          <a:p xmlns:a="http://schemas.openxmlformats.org/drawingml/2006/main"/>
+          <a:p xmlns:a="http://schemas.openxmlformats.org/drawingml/2006/main">
+            <a:r>
+              <a:t>In the middle, one row per event. Ticket 1003 has three event records. When we join the ticket to its events, we get three rows, each pairing the same ticket with a different event. You will see 1003 three times. That does not mean three people reported low water pressure. It means one request has a history with three entries.</a:t>
+            </a:r>
+          </a:p>
+          <a:p xmlns:a="http://schemas.openxmlformats.org/drawingml/2006/main"/>
+          <a:p xmlns:a="http://schemas.openxmlformats.org/drawingml/2006/main">
+            <a:r>
+              <a:t>On the right, one row per status. If we group tickets by status, we get one row for open, one for resolved, and so on, each with a count. Now a row is a group of requests, and no single subject describes it anymore.</a:t>
+            </a:r>
+          </a:p>
+          <a:p xmlns:a="http://schemas.openxmlformats.org/drawingml/2006/main"/>
+          <a:p xmlns:a="http://schemas.openxmlformats.org/drawingml/2006/main">
+            <a:r>
+              <a:t>Why does this matter? Because someone always asks for a count. If you count ticket-event pairs and label the number tickets, your report is wrong, and nothing in SQL will warn you. So every time we write a query this week, I am going to ask the same question: what does one row represent? That answer tells you which join to use, how to count, and how to check the result.</a:t>
+            </a:r>
+          </a:p>
+          <a:p xmlns:a="http://schemas.openxmlformats.org/drawingml/2006/main"/>
           <a:p xmlns:a="http://schemas.openxmlformats.org/drawingml/2006/main">
             <a:r>
               <a:t>[Sources]</a:t>
@@ -2463,44 +2205,28 @@
           <a:lstStyle xmlns:a="http://schemas.openxmlformats.org/drawingml/2006/main"/>
           <a:p xmlns:a="http://schemas.openxmlformats.org/drawingml/2006/main">
             <a:r>
-              <a:t>Relational algebra gives names to operations on relations. In this setting, a relation is a set of tuples with named attributes. We can picture tuples as rows and attributes as columns. The symbols let us describe a data operation independently of a particular screen or programming language.</a:t>
-            </a:r>
-          </a:p>
-          <a:p xmlns:a="http://schemas.openxmlformats.org/drawingml/2006/main">
-            <a:r>
-              <a:t/>
-            </a:r>
-          </a:p>
-          <a:p xmlns:a="http://schemas.openxmlformats.org/drawingml/2006/main">
-            <a:r>
-              <a:t>Selection, written with the Greek letter sigma, keeps rows that satisfy a condition. In SQL, a WHERE clause commonly performs that job. Projection, written with pi, chooses attributes. SQL's output column list has that role, but there is an important difference: mathematical relations are sets, while SQL results retain repeated rows unless we request duplicate removal.</a:t>
-            </a:r>
-          </a:p>
-          <a:p xmlns:a="http://schemas.openxmlformats.org/drawingml/2006/main">
-            <a:r>
-              <a:t/>
-            </a:r>
-          </a:p>
-          <a:p xmlns:a="http://schemas.openxmlformats.org/drawingml/2006/main">
-            <a:r>
-              <a:t>A join forms pairs of related rows. The condition states what makes a pair relevant. Grouping, often written with gamma, combines rows and calculates a summary. Grouping belongs to extended relational algebra rather than the smallest classical operator set. Difference keeps rows present in one result and absent from another. SQL provides EXCEPT for compatible result shapes.</a:t>
-            </a:r>
-          </a:p>
-          <a:p xmlns:a="http://schemas.openxmlformats.org/drawingml/2006/main">
-            <a:r>
-              <a:t/>
-            </a:r>
-          </a:p>
-          <a:p xmlns:a="http://schemas.openxmlformats.org/drawingml/2006/main">
-            <a:r>
-              <a:t>We do not need to memorize all the symbols at once. The useful connection is between an operation's meaning and the SQL that expresses it. SQL also has NULL and three-valued logic, which require special care. Translating the notation into SQL therefore involves reasoning about duplicates, missing values, and the intended result, rather than replacing one symbol with one keyword mechanically.</a:t>
-            </a:r>
-          </a:p>
-          <a:p xmlns:a="http://schemas.openxmlformats.org/drawingml/2006/main">
-            <a:r>
-              <a:t/>
-            </a:r>
-          </a:p>
+              <a:t>Here is the vocabulary underneath SQL: relational algebra. A relation is a set of tuples with named attributes. Picture tuples as rows and attributes as columns. The point of the notation is that we can describe an operation on data without caring about any particular screen or programming language.</a:t>
+            </a:r>
+          </a:p>
+          <a:p xmlns:a="http://schemas.openxmlformats.org/drawingml/2006/main"/>
+          <a:p xmlns:a="http://schemas.openxmlformats.org/drawingml/2006/main">
+            <a:r>
+              <a:t>Read the table row by row. Selection, the Greek letter sigma, keeps rows where a condition is true. In SQL that is WHERE. Look at the last column: unknown does not pass WHERE. Hold on to that, because it comes back with NULL in two slides. Projection, pi, chooses columns. That is your SELECT list. But here is a difference: a mathematical relation is a set, so duplicates disappear. SQL keeps repeated rows unless you ask it to remove them.</a:t>
+            </a:r>
+          </a:p>
+          <a:p xmlns:a="http://schemas.openxmlformats.org/drawingml/2006/main"/>
+          <a:p xmlns:a="http://schemas.openxmlformats.org/drawingml/2006/main">
+            <a:r>
+              <a:t>Join forms matching pairs of rows, and one source row can have many matches. Remember the ticket with three events. Grouping, gamma, summarizes rows into groups. Strictly speaking it is an extension of the basic algebra, not one of the classic operators. Difference keeps rows in A that are absent from B. SQL calls that EXCEPT, and both sides need the same number of columns with compatible types.</a:t>
+            </a:r>
+          </a:p>
+          <a:p xmlns:a="http://schemas.openxmlformats.org/drawingml/2006/main"/>
+          <a:p xmlns:a="http://schemas.openxmlformats.org/drawingml/2006/main">
+            <a:r>
+              <a:t>You do not need to memorize the symbols today. What I want is the connection between what an operation means and the SQL that expresses it. And notice why it is never a mechanical translation: SQL adds duplicates and NULL, and you have to reason about both.</a:t>
+            </a:r>
+          </a:p>
+          <a:p xmlns:a="http://schemas.openxmlformats.org/drawingml/2006/main"/>
           <a:p xmlns:a="http://schemas.openxmlformats.org/drawingml/2006/main">
             <a:r>
               <a:t>[Sources]</a:t>
@@ -2583,44 +2309,28 @@
           <a:lstStyle xmlns:a="http://schemas.openxmlformats.org/drawingml/2006/main"/>
           <a:p xmlns:a="http://schemas.openxmlformats.org/drawingml/2006/main">
             <a:r>
-              <a:t>This query finds all high-priority tickets, whether active or finished. Read the source first: metro_support.tickets names the tickets table inside the metro_support schema. A schema is a named namespace within a database. Using the prefix makes this query work even when a new editor tab has a different default search path.</a:t>
-            </a:r>
-          </a:p>
-          <a:p xmlns:a="http://schemas.openxmlformats.org/drawingml/2006/main">
-            <a:r>
-              <a:t/>
-            </a:r>
-          </a:p>
-          <a:p xmlns:a="http://schemas.openxmlformats.org/drawingml/2006/main">
-            <a:r>
-              <a:t>The WHERE clause retains rows whose priority equals the text value high. SQL text literals use single quotation marks. The SELECT list chooses three output columns: ticket_id, subject, and priority. ORDER BY places the rows in ascending ticket-ID order. It does not change which tickets qualify.</a:t>
-            </a:r>
-          </a:p>
-          <a:p xmlns:a="http://schemas.openxmlformats.org/drawingml/2006/main">
-            <a:r>
-              <a:t/>
-            </a:r>
-          </a:p>
-          <a:p xmlns:a="http://schemas.openxmlformats.org/drawingml/2006/main">
-            <a:r>
-              <a:t>On the complete lab dataset, the four matching identifiers are 1001, 1005, 1008, and 1011. Tickets 1005 and 1008 are resolved. Their presence is correct for this query because we have not asked for active status yet. To answer the reporting question from the earlier slide, we would add a condition on status.</a:t>
-            </a:r>
-          </a:p>
-          <a:p xmlns:a="http://schemas.openxmlformats.org/drawingml/2006/main">
-            <a:r>
-              <a:t/>
-            </a:r>
-          </a:p>
-          <a:p xmlns:a="http://schemas.openxmlformats.org/drawingml/2006/main">
-            <a:r>
-              <a:t>The result has one row per matching ticket because this query reads the tickets table directly and retains its identifier. If we selected only priority, SQL would return four rows containing high. SELECT DISTINCT priority would instead return one row. That is the difference between choosing a column and explicitly removing duplicate result values.</a:t>
-            </a:r>
-          </a:p>
-          <a:p xmlns:a="http://schemas.openxmlformats.org/drawingml/2006/main">
-            <a:r>
-              <a:t/>
-            </a:r>
-          </a:p>
+              <a:t>Let's write the first real query. Read it from the FROM line. metro_support.tickets means the tickets table inside the metro_support schema. A schema is a named namespace inside the database. Why bother with the prefix? Because a new editor tab may have a different default search path, and without the prefix your query might not find the table at all.</a:t>
+            </a:r>
+          </a:p>
+          <a:p xmlns:a="http://schemas.openxmlformats.org/drawingml/2006/main"/>
+          <a:p xmlns:a="http://schemas.openxmlformats.org/drawingml/2006/main">
+            <a:r>
+              <a:t>WHERE priority = 'high' keeps rows whose priority is the text value high. Text in SQL goes in single quotes. The SELECT list chooses three columns: ticket_id, subject, and priority. ORDER BY ticket_id sorts the result. Look at the note on the right: ORDER BY changes order, not membership. Sorting never adds or removes a ticket.</a:t>
+            </a:r>
+          </a:p>
+          <a:p xmlns:a="http://schemas.openxmlformats.org/drawingml/2006/main"/>
+          <a:p xmlns:a="http://schemas.openxmlformats.org/drawingml/2006/main">
+            <a:r>
+              <a:t>The result is four tickets: 1001, 1005, 1008, and 1011. Now look closer. 1005 and 1008 are resolved. Is the query wrong? No. It answers exactly what it asks, all high-priority tickets. It just is not the question from slide 2 yet. To get there we would add a condition on status.</a:t>
+            </a:r>
+          </a:p>
+          <a:p xmlns:a="http://schemas.openxmlformats.org/drawingml/2006/main"/>
+          <a:p xmlns:a="http://schemas.openxmlformats.org/drawingml/2006/main">
+            <a:r>
+              <a:t>One more thing about grain. This result has one row per ticket because we kept ticket_id. If I selected only the priority column, I would get four rows that all say high. SELECT DISTINCT priority would give one row. Choosing a column and removing duplicates are two different decisions, and SQL makes you say which one you want.</a:t>
+            </a:r>
+          </a:p>
+          <a:p xmlns:a="http://schemas.openxmlformats.org/drawingml/2006/main"/>
           <a:p xmlns:a="http://schemas.openxmlformats.org/drawingml/2006/main">
             <a:r>
               <a:t>[Sources]</a:t>
@@ -2708,54 +2418,34 @@
           <a:lstStyle xmlns:a="http://schemas.openxmlformats.org/drawingml/2006/main"/>
           <a:p xmlns:a="http://schemas.openxmlformats.org/drawingml/2006/main">
             <a:r>
-              <a:t>Two tickets in our dataset do not yet have an assigned staff member. Their assignee_id is NULL. NULL marks missing information. It is not the number zero, an empty string, or an identifier for an imaginary staff member.</a:t>
-            </a:r>
-          </a:p>
-          <a:p xmlns:a="http://schemas.openxmlformats.org/drawingml/2006/main">
-            <a:r>
-              <a:t/>
-            </a:r>
-          </a:p>
-          <a:p xmlns:a="http://schemas.openxmlformats.org/drawingml/2006/main">
-            <a:r>
-              <a:t>The first predicate uses ordinary equality: assignee_id equals NULL. SQL cannot establish that comparison as true. Comparing an ordinary value with missing information produces unknown, and comparing NULL with NULL also produces unknown. WHERE keeps only rows for which its condition is true. That explains why the first query returns no rows even though unassigned tickets exist.</a:t>
-            </a:r>
-          </a:p>
-          <a:p xmlns:a="http://schemas.openxmlformats.org/drawingml/2006/main">
-            <a:r>
-              <a:t/>
-            </a:r>
-          </a:p>
-          <a:p xmlns:a="http://schemas.openxmlformats.org/drawingml/2006/main">
-            <a:r>
-              <a:t>IS NULL is the predicate designed for this situation. It returns tickets 1004 and 1009. IS NOT NULL returns the other ten tickets. Together these two tests account for all twelve rows.</a:t>
-            </a:r>
-          </a:p>
-          <a:p xmlns:a="http://schemas.openxmlformats.org/drawingml/2006/main">
-            <a:r>
-              <a:t/>
-            </a:r>
-          </a:p>
-          <a:p xmlns:a="http://schemas.openxmlformats.org/drawingml/2006/main">
-            <a:r>
-              <a:t>Unknown and false both fail a WHERE filter, but they are not interchangeable in every SQL context. For example, NOT applied to unknown remains unknown. This is one reason negative conditions can surprise us. The textbook includes a small truth-table example if you want to follow that distinction further.</a:t>
-            </a:r>
-          </a:p>
-          <a:p xmlns:a="http://schemas.openxmlformats.org/drawingml/2006/main">
-            <a:r>
-              <a:t/>
-            </a:r>
-          </a:p>
-          <a:p xmlns:a="http://schemas.openxmlformats.org/drawingml/2006/main">
-            <a:r>
-              <a:t>For the lab, the immediate skill is recognizing a missing value and choosing the appropriate predicate. A blank-looking result cell alone is not a complete explanation. We should know which field is missing, what that means in the case, and whether the report must include that row.</a:t>
-            </a:r>
-          </a:p>
-          <a:p xmlns:a="http://schemas.openxmlformats.org/drawingml/2006/main">
-            <a:r>
-              <a:t/>
-            </a:r>
-          </a:p>
+              <a:t>Two tickets in our dataset have nobody assigned yet. Their assignee_id is NULL. NULL means the information is missing. It is not zero, it is not an empty string, and it is not some imaginary staff member.</a:t>
+            </a:r>
+          </a:p>
+          <a:p xmlns:a="http://schemas.openxmlformats.org/drawingml/2006/main"/>
+          <a:p xmlns:a="http://schemas.openxmlformats.org/drawingml/2006/main">
+            <a:r>
+              <a:t>Look at the three predicates on the slide. The first is the one everybody writes: assignee_id = NULL. Result: no rows. Why? Comparing a value to missing information does not give true or false. It gives unknown. Even NULL compared to NULL is unknown, because two missing values are not known to be equal. And WHERE keeps only rows where the condition is true. Unknown is not true, so every row is dropped. The query runs fine, returns nothing, and looks like it is telling you every ticket is assigned. It is not.</a:t>
+            </a:r>
+          </a:p>
+          <a:p xmlns:a="http://schemas.openxmlformats.org/drawingml/2006/main"/>
+          <a:p xmlns:a="http://schemas.openxmlformats.org/drawingml/2006/main">
+            <a:r>
+              <a:t>The second predicate, IS NULL, is built for exactly this. It returns tickets 1004 and 1009. The third, IS NOT NULL, returns the other ten. Ten plus two is twelve, so together they account for every ticket.</a:t>
+            </a:r>
+          </a:p>
+          <a:p xmlns:a="http://schemas.openxmlformats.org/drawingml/2006/main"/>
+          <a:p xmlns:a="http://schemas.openxmlformats.org/drawingml/2006/main">
+            <a:r>
+              <a:t>One subtlety. Unknown and false both fail WHERE, but they are not the same thing. NOT applied to unknown is still unknown, which is why negative conditions can surprise you. The chapter has a short truth table if you want to follow that further.</a:t>
+            </a:r>
+          </a:p>
+          <a:p xmlns:a="http://schemas.openxmlformats.org/drawingml/2006/main"/>
+          <a:p xmlns:a="http://schemas.openxmlformats.org/drawingml/2006/main">
+            <a:r>
+              <a:t>For the lab, the skill is simple: recognize a missing value, use IS NULL, and be able to say which field is missing and whether the report must still include that row.</a:t>
+            </a:r>
+          </a:p>
+          <a:p xmlns:a="http://schemas.openxmlformats.org/drawingml/2006/main"/>
           <a:p xmlns:a="http://schemas.openxmlformats.org/drawingml/2006/main">
             <a:r>
               <a:t>[Sources]</a:t>
@@ -2838,54 +2528,34 @@
           <a:lstStyle xmlns:a="http://schemas.openxmlformats.org/drawingml/2006/main"/>
           <a:p xmlns:a="http://schemas.openxmlformats.org/drawingml/2006/main">
             <a:r>
-              <a:t>This query asks for the three newest active requests. The word active has an explicit definition in the WHERE clause: new, open, or in_progress. IN means that the status must equal one of the listed values. A resolved request does not qualify even if its opening time is very recent.</a:t>
-            </a:r>
-          </a:p>
-          <a:p xmlns:a="http://schemas.openxmlformats.org/drawingml/2006/main">
-            <a:r>
-              <a:t/>
-            </a:r>
-          </a:p>
-          <a:p xmlns:a="http://schemas.openxmlformats.org/drawingml/2006/main">
-            <a:r>
-              <a:t>ORDER BY sorts by opened_at in descending order, so later timestamps come first. DESC means descending. The second sort key, ticket_id descending, resolves ties if two requests share the same opening time. LIMIT 3 then keeps the first three rows of the ordered result.</a:t>
-            </a:r>
-          </a:p>
-          <a:p xmlns:a="http://schemas.openxmlformats.org/drawingml/2006/main">
-            <a:r>
-              <a:t/>
-            </a:r>
-          </a:p>
-          <a:p xmlns:a="http://schemas.openxmlformats.org/drawingml/2006/main">
-            <a:r>
-              <a:t>In the complete dataset, the identifiers are 1011, 1009, and 1007, in that order. Ticket 1012 is newer, but it is resolved and therefore excluded. Ticket 1009 has no assignee, but that does not exclude it because this query does not require an assignee.</a:t>
-            </a:r>
-          </a:p>
-          <a:p xmlns:a="http://schemas.openxmlformats.org/drawingml/2006/main">
-            <a:r>
-              <a:t/>
-            </a:r>
-          </a:p>
-          <a:p xmlns:a="http://schemas.openxmlformats.org/drawingml/2006/main">
-            <a:r>
-              <a:t>Without ORDER BY, LIMIT would still return at most three rows, but they would not reliably be the newest three. Apparent storage order is not a promise. A database may change its access path as data and indexes change.</a:t>
-            </a:r>
-          </a:p>
-          <a:p xmlns:a="http://schemas.openxmlformats.org/drawingml/2006/main">
-            <a:r>
-              <a:t/>
-            </a:r>
-          </a:p>
-          <a:p xmlns:a="http://schemas.openxmlformats.org/drawingml/2006/main">
-            <a:r>
-              <a:t>This query illustrates how clauses answer different parts of a question. The filter defines eligibility, the sort defines precedence, and the limit defines the maximum number of results. Changing one part changes the question. The lab will use this pattern without requiring any advanced date arithmetic.</a:t>
-            </a:r>
-          </a:p>
-          <a:p xmlns:a="http://schemas.openxmlformats.org/drawingml/2006/main">
-            <a:r>
-              <a:t/>
-            </a:r>
-          </a:p>
+              <a:t>Now a query with more moving parts: the three newest active requests. Each clause answers a different part of the question, so let's read it that way.</a:t>
+            </a:r>
+          </a:p>
+          <a:p xmlns:a="http://schemas.openxmlformats.org/drawingml/2006/main"/>
+          <a:p xmlns:a="http://schemas.openxmlformats.org/drawingml/2006/main">
+            <a:r>
+              <a:t>WHERE status IN new, open, in_progress. IN means the status must equal one of the listed values. That is our definition of active, written down explicitly. A resolved request does not qualify, no matter how recent it is.</a:t>
+            </a:r>
+          </a:p>
+          <a:p xmlns:a="http://schemas.openxmlformats.org/drawingml/2006/main"/>
+          <a:p xmlns:a="http://schemas.openxmlformats.org/drawingml/2006/main">
+            <a:r>
+              <a:t>ORDER BY opened_at DESC. DESC means descending, so the latest timestamps come first. Then a second sort key, ticket_id descending. Why? If two requests opened at exactly the same time, the database could put them in either order. The second key breaks the tie, so you get the same answer every time. Then LIMIT 3 keeps the first three rows of the sorted result.</a:t>
+            </a:r>
+          </a:p>
+          <a:p xmlns:a="http://schemas.openxmlformats.org/drawingml/2006/main"/>
+          <a:p xmlns:a="http://schemas.openxmlformats.org/drawingml/2006/main">
+            <a:r>
+              <a:t>The answer, in order, is 1011, 1009, and 1007. Two things to notice. Ticket 1012 is newer than all of them, but it is resolved, so the filter removed it before the sort ever mattered. And 1009 has no assignee, but that does not exclude it, because nothing in this query asks for an assignee.</a:t>
+            </a:r>
+          </a:p>
+          <a:p xmlns:a="http://schemas.openxmlformats.org/drawingml/2006/main"/>
+          <a:p xmlns:a="http://schemas.openxmlformats.org/drawingml/2006/main">
+            <a:r>
+              <a:t>Here is the trap. Without ORDER BY, LIMIT 3 still returns three rows, and they might even look right today. But the order rows happen to come out in is not a promise. As data and indexes change, the database may read them differently. So the filter defines who is eligible, the sort defines who comes first, and the limit defines how many you keep.</a:t>
+            </a:r>
+          </a:p>
+          <a:p xmlns:a="http://schemas.openxmlformats.org/drawingml/2006/main"/>
           <a:p xmlns:a="http://schemas.openxmlformats.org/drawingml/2006/main">
             <a:r>
               <a:t>[Sources]</a:t>
@@ -2973,54 +2643,28 @@
           <a:lstStyle xmlns:a="http://schemas.openxmlformats.org/drawingml/2006/main"/>
           <a:p xmlns:a="http://schemas.openxmlformats.org/drawingml/2006/main">
             <a:r>
-              <a:t>This diagram shows three selected tickets from the full dataset. Maya has user ID 101 and requested tickets 1001 and 1005. Luis has user ID 102 and requested ticket 1002. The lines connect each ticket's requester_id to the matching user's user_id.</a:t>
-            </a:r>
-          </a:p>
-          <a:p xmlns:a="http://schemas.openxmlformats.org/drawingml/2006/main">
-            <a:r>
-              <a:t/>
-            </a:r>
-          </a:p>
-          <a:p xmlns:a="http://schemas.openxmlformats.org/drawingml/2006/main">
-            <a:r>
-              <a:t>Those matching identifiers express a relationship. The fact that two columns contain numbers is not enough to justify joining them. We need to know what the numbers identify. A requester ID identifies the person who reported a problem. An assignee ID identifies the staff member responsible for handling it. Those relationships answer different questions.</a:t>
-            </a:r>
-          </a:p>
-          <a:p xmlns:a="http://schemas.openxmlformats.org/drawingml/2006/main">
-            <a:r>
-              <a:t/>
-            </a:r>
-          </a:p>
-          <a:p xmlns:a="http://schemas.openxmlformats.org/drawingml/2006/main">
-            <a:r>
-              <a:t>An inner join keeps matching pairs. Maya's user information appears in two pairs in this excerpt because two different tickets refer to her. That repetition is expected. It does not mean that the users table contains duplicate Maya records.</a:t>
-            </a:r>
-          </a:p>
-          <a:p xmlns:a="http://schemas.openxmlformats.org/drawingml/2006/main">
-            <a:r>
-              <a:t/>
-            </a:r>
-          </a:p>
-          <a:p xmlns:a="http://schemas.openxmlformats.org/drawingml/2006/main">
-            <a:r>
-              <a:t>This diagram is an excerpt, not the complete history of either resident. The full dataset includes other tickets. The schema ensures that each ticket has a requester referring to a valid user, so the requester join can preserve one result row per ticket. A different relationship can behave differently. A ticket can have no assignee or many events, and we will see both cases.</a:t>
-            </a:r>
-          </a:p>
-          <a:p xmlns:a="http://schemas.openxmlformats.org/drawingml/2006/main">
-            <a:r>
-              <a:t/>
-            </a:r>
-          </a:p>
-          <a:p xmlns:a="http://schemas.openxmlformats.org/drawingml/2006/main">
-            <a:r>
-              <a:t>Reading the relationship before writing SQL prevents a common error: joining columns that look similar but represent different roles in the application.</a:t>
-            </a:r>
-          </a:p>
-          <a:p xmlns:a="http://schemas.openxmlformats.org/drawingml/2006/main">
-            <a:r>
-              <a:t/>
-            </a:r>
-          </a:p>
+              <a:t>Now we connect two tables. This diagram shows three tickets from the full dataset. On the left, two users, 101 and 102. On the right, tickets. Tickets 1001 and 1005 were requested by Requester 101. Ticket 1002 was requested by Requester 102. Each line connects a ticket's requester_id to a user's user_id.</a:t>
+            </a:r>
+          </a:p>
+          <a:p xmlns:a="http://schemas.openxmlformats.org/drawingml/2006/main"/>
+          <a:p xmlns:a="http://schemas.openxmlformats.org/drawingml/2006/main">
+            <a:r>
+              <a:t>That matching ID is a relationship, and I want you to think about what it means before you write any join. Two columns that both contain numbers is not a reason to join them. A requester ID identifies the person who reported a problem. An assignee ID identifies the staff member handling it. Both point at the users table, and they answer completely different questions. Join on the wrong one and your query runs perfectly and reports nonsense.</a:t>
+            </a:r>
+          </a:p>
+          <a:p xmlns:a="http://schemas.openxmlformats.org/drawingml/2006/main"/>
+          <a:p xmlns:a="http://schemas.openxmlformats.org/drawingml/2006/main">
+            <a:r>
+              <a:t>An inner join keeps matching pairs. Look at Requester 101: that user shows up in two pairs, because two different tickets point to the same person. That repetition is expected. It does not mean the users table has two copies of Requester 101.</a:t>
+            </a:r>
+          </a:p>
+          <a:p xmlns:a="http://schemas.openxmlformats.org/drawingml/2006/main"/>
+          <a:p xmlns:a="http://schemas.openxmlformats.org/drawingml/2006/main">
+            <a:r>
+              <a:t>Keep in mind this is only an excerpt. The full dataset has other tickets for these residents too. Because every ticket must have a requester who actually exists, the requester join keeps exactly one row per ticket. Other relationships behave differently. A ticket can have no assignee at all, or many events, and we will see both cases. Reading the relationship first is what stops you from joining columns that only look alike.</a:t>
+            </a:r>
+          </a:p>
+          <a:p xmlns:a="http://schemas.openxmlformats.org/drawingml/2006/main"/>
           <a:p xmlns:a="http://schemas.openxmlformats.org/drawingml/2006/main">
             <a:r>
               <a:t>[Sources]</a:t>
@@ -3103,54 +2747,40 @@
           <a:lstStyle xmlns:a="http://schemas.openxmlformats.org/drawingml/2006/main"/>
           <a:p xmlns:a="http://schemas.openxmlformats.org/drawingml/2006/main">
             <a:r>
-              <a:t>Here is the requester relationship written in SQL. FROM names the tickets table and gives it the alias t. An alias is a shorter name used within this statement. The users table receives the alias u. These aliases make it easier to see which table supplies each column.</a:t>
-            </a:r>
-          </a:p>
-          <a:p xmlns:a="http://schemas.openxmlformats.org/drawingml/2006/main">
-            <a:r>
-              <a:t/>
-            </a:r>
-          </a:p>
-          <a:p xmlns:a="http://schemas.openxmlformats.org/drawingml/2006/main">
-            <a:r>
-              <a:t>The ON condition matches u.user_id with t.requester_id. It describes which user-ticket pairs belong together. The WHERE condition then keeps open tickets. In this dataset, open is one specific status. It is narrower than our active definition, which also includes new and in_progress.</a:t>
-            </a:r>
-          </a:p>
-          <a:p xmlns:a="http://schemas.openxmlformats.org/drawingml/2006/main">
-            <a:r>
-              <a:t/>
-            </a:r>
-          </a:p>
-          <a:p xmlns:a="http://schemas.openxmlformats.org/drawingml/2006/main">
-            <a:r>
-              <a:t>SELECT returns the ticket identifier, subject, and requester's display name. The complete fixture returns tickets 1001, 1007, and 1011. Maya requested 1001. Amina requested 1007 and 1011. Her name therefore appears twice for two different requests.</a:t>
-            </a:r>
-          </a:p>
-          <a:p xmlns:a="http://schemas.openxmlformats.org/drawingml/2006/main">
-            <a:r>
-              <a:t/>
-            </a:r>
-          </a:p>
-          <a:p xmlns:a="http://schemas.openxmlformats.org/drawingml/2006/main">
-            <a:r>
-              <a:t>We could check this result by finding open ticket IDs in tickets.csv, reading each requester ID, and looking up those users in users.csv. That is an independent check of the same relationship, rather than running the same SQL twice.</a:t>
-            </a:r>
-          </a:p>
-          <a:p xmlns:a="http://schemas.openxmlformats.org/drawingml/2006/main">
-            <a:r>
-              <a:t/>
-            </a:r>
-          </a:p>
-          <a:p xmlns:a="http://schemas.openxmlformats.org/drawingml/2006/main">
-            <a:r>
-              <a:t>The first lab changes this example into a neighborhood question. Neighborhood belongs to users, so joining requester information gives the query access to that value. Keep the relationship condition, then adapt the filter. A condition on a resident's neighborhood should use the requester relationship, not the staff assignee relationship.</a:t>
-            </a:r>
-          </a:p>
-          <a:p xmlns:a="http://schemas.openxmlformats.org/drawingml/2006/main">
-            <a:r>
-              <a:t/>
-            </a:r>
-          </a:p>
+              <a:t>Here is that requester relationship written in SQL. I want you to read it in the order shown on the right, not top to bottom.</a:t>
+            </a:r>
+          </a:p>
+          <a:p xmlns:a="http://schemas.openxmlformats.org/drawingml/2006/main"/>
+          <a:p xmlns:a="http://schemas.openxmlformats.org/drawingml/2006/main">
+            <a:r>
+              <a:t>First, the sources. FROM metro_support.tickets AS t, JOIN metro_support.users AS u. The letters t and u are aliases, short names that exist only inside this statement. They make it obvious which table each column comes from.</a:t>
+            </a:r>
+          </a:p>
+          <a:p xmlns:a="http://schemas.openxmlformats.org/drawingml/2006/main"/>
+          <a:p xmlns:a="http://schemas.openxmlformats.org/drawingml/2006/main">
+            <a:r>
+              <a:t>Second, the matching condition. ON u.user_id = t.requester_id. That says which user-ticket pairs belong together: the user who reported the ticket. Look at the note at the bottom. requester_id means who reported the issue. assignee_id means who is handling it. Same users table, different relationship.</a:t>
+            </a:r>
+          </a:p>
+          <a:p xmlns:a="http://schemas.openxmlformats.org/drawingml/2006/main"/>
+          <a:p xmlns:a="http://schemas.openxmlformats.org/drawingml/2006/main">
+            <a:r>
+              <a:t>Third, the filter and the grain. WHERE t.status = 'open'. Notice that open is one specific status. It is narrower than our active definition, which also includes new and in_progress. The SELECT gives one row per open ticket, with its subject and the requester's display name.</a:t>
+            </a:r>
+          </a:p>
+          <a:p xmlns:a="http://schemas.openxmlformats.org/drawingml/2006/main"/>
+          <a:p xmlns:a="http://schemas.openxmlformats.org/drawingml/2006/main">
+            <a:r>
+              <a:t>The result is tickets 1001, 1007, and 1011. Requester 101 reported 1001. Requester 103 reported both 1007 and 1011, so that name appears twice, for two different requests.</a:t>
+            </a:r>
+          </a:p>
+          <a:p xmlns:a="http://schemas.openxmlformats.org/drawingml/2006/main"/>
+          <a:p xmlns:a="http://schemas.openxmlformats.org/drawingml/2006/main">
+            <a:r>
+              <a:t>How would you check this without trusting the query? Open tickets.csv, find the open tickets, read their requester IDs, and look those up in users.csv. That is a second path to the same answer. In Lab 1 you will adapt this into a neighborhood question. Neighborhood lives on the users table, so you need the requester relationship, not the assignee.</a:t>
+            </a:r>
+          </a:p>
+          <a:p xmlns:a="http://schemas.openxmlformats.org/drawingml/2006/main"/>
           <a:p xmlns:a="http://schemas.openxmlformats.org/drawingml/2006/main">
             <a:r>
               <a:t>[Sources]</a:t>
@@ -9481,7 +9111,7 @@
                           <a:ea typeface="Helvetica Neue"/>
                           <a:cs typeface="Helvetica Neue"/>
                         </a:rPr>
-                        <a:t>Priya (201)</a:t>
+                        <a:t>Agent 201 (201)</a:t>
                       </a:r>
                     </a:p>
                   </a:txBody>
@@ -9531,7 +9161,7 @@
                           <a:ea typeface="Helvetica Neue"/>
                           <a:cs typeface="Helvetica Neue"/>
                         </a:rPr>
-                        <a:t>Noah (202)</a:t>
+                        <a:t>Agent 202 (202)</a:t>
                       </a:r>
                     </a:p>
                   </a:txBody>
@@ -9581,7 +9211,7 @@
                           <a:ea typeface="Helvetica Neue"/>
                           <a:cs typeface="Helvetica Neue"/>
                         </a:rPr>
-                        <a:t>Elena (203)</a:t>
+                        <a:t>Agent 203 (203)</a:t>
                       </a:r>
                     </a:p>
                   </a:txBody>
@@ -9672,7 +9302,7 @@
                 <a:ea typeface="Helvetica Neue"/>
                 <a:cs typeface="Helvetica Neue"/>
               </a:rPr>
-              <a:t>Elena has no match.</a:t>
+              <a:t>Agent 203 has no match.</a:t>
             </a:r>
           </a:p>
           <a:p xmlns:a="http://schemas.openxmlformats.org/drawingml/2006/main">
@@ -20401,7 +20031,7 @@
                 <a:ea typeface="Helvetica Neue"/>
                 <a:cs typeface="Helvetica Neue"/>
               </a:rPr>
-              <a:t>Three-ticket excerpt. Maya (101) requested 1001 and 1005; Luis (102) requested 1002.</a:t>
+              <a:t>Three-ticket excerpt. Requester 101 (101) requested 1001 and 1005; Requester 102 (102) requested 1002.</a:t>
             </a:r>
           </a:p>
         </p:txBody>
